--- a/cse4001_pdc_t/CSE4001-Module1_1.pptx
+++ b/cse4001_pdc_t/CSE4001-Module1_1.pptx
@@ -1,55 +1,55 @@
 
 <file path=ppt/presentation.xml><?xml version="1.0" encoding="utf-8"?>
-<p:presentation xmlns:a="http://schemas.openxmlformats.org/drawingml/2006/main" xmlns:r="http://schemas.openxmlformats.org/officeDocument/2006/relationships" xmlns:p="http://schemas.openxmlformats.org/presentationml/2006/main" showSpecialPlsOnTitleSld="0" saveSubsetFonts="1">
+<p:presentation xmlns:a="http://schemas.openxmlformats.org/drawingml/2006/main" xmlns:r="http://schemas.openxmlformats.org/officeDocument/2006/relationships" xmlns:p="http://schemas.openxmlformats.org/presentationml/2006/main" showSpecialPlsOnTitleSld="0">
   <p:sldMasterIdLst>
-    <p:sldMasterId id="2147483648" r:id="rId4"/>
+    <p:sldMasterId id="2147483648" r:id="rId1"/>
   </p:sldMasterIdLst>
   <p:notesMasterIdLst>
-    <p:notesMasterId r:id="rId47"/>
+    <p:notesMasterId r:id="rId4"/>
   </p:notesMasterIdLst>
   <p:sldIdLst>
-    <p:sldId id="256" r:id="rId5"/>
-    <p:sldId id="258" r:id="rId6"/>
-    <p:sldId id="259" r:id="rId7"/>
-    <p:sldId id="260" r:id="rId8"/>
-    <p:sldId id="261" r:id="rId9"/>
-    <p:sldId id="262" r:id="rId10"/>
-    <p:sldId id="263" r:id="rId11"/>
-    <p:sldId id="264" r:id="rId12"/>
-    <p:sldId id="265" r:id="rId13"/>
-    <p:sldId id="266" r:id="rId14"/>
-    <p:sldId id="267" r:id="rId15"/>
-    <p:sldId id="268" r:id="rId16"/>
-    <p:sldId id="269" r:id="rId17"/>
-    <p:sldId id="270" r:id="rId18"/>
-    <p:sldId id="271" r:id="rId19"/>
-    <p:sldId id="275" r:id="rId20"/>
-    <p:sldId id="272" r:id="rId21"/>
-    <p:sldId id="273" r:id="rId22"/>
-    <p:sldId id="274" r:id="rId23"/>
-    <p:sldId id="276" r:id="rId24"/>
-    <p:sldId id="277" r:id="rId25"/>
-    <p:sldId id="278" r:id="rId26"/>
-    <p:sldId id="279" r:id="rId27"/>
-    <p:sldId id="280" r:id="rId28"/>
-    <p:sldId id="281" r:id="rId29"/>
-    <p:sldId id="282" r:id="rId30"/>
-    <p:sldId id="283" r:id="rId31"/>
-    <p:sldId id="284" r:id="rId32"/>
-    <p:sldId id="285" r:id="rId33"/>
-    <p:sldId id="286" r:id="rId34"/>
-    <p:sldId id="287" r:id="rId35"/>
-    <p:sldId id="288" r:id="rId36"/>
-    <p:sldId id="289" r:id="rId37"/>
-    <p:sldId id="290" r:id="rId38"/>
-    <p:sldId id="291" r:id="rId39"/>
-    <p:sldId id="292" r:id="rId40"/>
-    <p:sldId id="293" r:id="rId41"/>
-    <p:sldId id="294" r:id="rId42"/>
-    <p:sldId id="295" r:id="rId43"/>
-    <p:sldId id="296" r:id="rId44"/>
-    <p:sldId id="297" r:id="rId45"/>
-    <p:sldId id="298" r:id="rId46"/>
+    <p:sldId id="256" r:id="rId3"/>
+    <p:sldId id="258" r:id="rId5"/>
+    <p:sldId id="259" r:id="rId6"/>
+    <p:sldId id="260" r:id="rId7"/>
+    <p:sldId id="261" r:id="rId8"/>
+    <p:sldId id="262" r:id="rId9"/>
+    <p:sldId id="263" r:id="rId10"/>
+    <p:sldId id="264" r:id="rId11"/>
+    <p:sldId id="265" r:id="rId12"/>
+    <p:sldId id="266" r:id="rId13"/>
+    <p:sldId id="267" r:id="rId14"/>
+    <p:sldId id="268" r:id="rId15"/>
+    <p:sldId id="269" r:id="rId16"/>
+    <p:sldId id="270" r:id="rId17"/>
+    <p:sldId id="271" r:id="rId18"/>
+    <p:sldId id="275" r:id="rId19"/>
+    <p:sldId id="272" r:id="rId20"/>
+    <p:sldId id="273" r:id="rId21"/>
+    <p:sldId id="274" r:id="rId22"/>
+    <p:sldId id="276" r:id="rId23"/>
+    <p:sldId id="277" r:id="rId24"/>
+    <p:sldId id="278" r:id="rId25"/>
+    <p:sldId id="279" r:id="rId26"/>
+    <p:sldId id="280" r:id="rId27"/>
+    <p:sldId id="281" r:id="rId28"/>
+    <p:sldId id="282" r:id="rId29"/>
+    <p:sldId id="283" r:id="rId30"/>
+    <p:sldId id="284" r:id="rId31"/>
+    <p:sldId id="285" r:id="rId32"/>
+    <p:sldId id="286" r:id="rId33"/>
+    <p:sldId id="287" r:id="rId34"/>
+    <p:sldId id="288" r:id="rId35"/>
+    <p:sldId id="289" r:id="rId36"/>
+    <p:sldId id="290" r:id="rId37"/>
+    <p:sldId id="291" r:id="rId38"/>
+    <p:sldId id="292" r:id="rId39"/>
+    <p:sldId id="293" r:id="rId40"/>
+    <p:sldId id="294" r:id="rId41"/>
+    <p:sldId id="295" r:id="rId42"/>
+    <p:sldId id="296" r:id="rId43"/>
+    <p:sldId id="297" r:id="rId44"/>
+    <p:sldId id="298" r:id="rId45"/>
   </p:sldIdLst>
   <p:sldSz cx="9144000" cy="6858000" type="screen4x3"/>
   <p:notesSz cx="6858000" cy="9144000"/>
@@ -148,60 +148,7 @@
       </a:defRPr>
     </a:lvl9pPr>
   </p:defaultTextStyle>
-  <p:extLst>
-    <p:ext uri="{EFAFB233-063F-42B5-8137-9DF3F51BA10A}">
-      <p15:sldGuideLst xmlns:p15="http://schemas.microsoft.com/office/powerpoint/2012/main">
-        <p15:guide id="1" orient="horz" pos="2160">
-          <p15:clr>
-            <a:srgbClr val="A4A3A4"/>
-          </p15:clr>
-        </p15:guide>
-        <p15:guide id="2" pos="2880">
-          <p15:clr>
-            <a:srgbClr val="A4A3A4"/>
-          </p15:clr>
-        </p15:guide>
-      </p15:sldGuideLst>
-    </p:ext>
-  </p:extLst>
 </p:presentation>
-</file>
-
-<file path=ppt/revisionInfo.xml><?xml version="1.0" encoding="utf-8"?>
-<p1510:revInfo xmlns:a="http://schemas.openxmlformats.org/drawingml/2006/main" xmlns:r="http://schemas.openxmlformats.org/officeDocument/2006/relationships" xmlns:p1510="http://schemas.microsoft.com/office/powerpoint/2015/10/main">
-  <p1510:revLst>
-    <p1510:client id="{E276D9E6-17BF-4673-AD8E-47A8259076AE}" v="2" dt="2022-07-25T03:56:42.414"/>
-  </p1510:revLst>
-</p1510:revInfo>
-</file>
-
-<file path=ppt/changesInfos/changesInfo1.xml><?xml version="1.0" encoding="utf-8"?>
-<pc:chgInfo xmlns:a="http://schemas.openxmlformats.org/drawingml/2006/main" xmlns:r="http://schemas.openxmlformats.org/officeDocument/2006/relationships" xmlns:ac="http://schemas.microsoft.com/office/drawing/2013/main/command" xmlns:pc="http://schemas.microsoft.com/office/powerpoint/2013/main/command">
-  <pc:docChgLst>
-    <pc:chgData name="Gayathri raj" userId="S::gayathri.r@vit.ac.in::df52d4f3-b744-4c12-a999-b1c829e76304" providerId="AD" clId="Web-{E276D9E6-17BF-4673-AD8E-47A8259076AE}"/>
-    <pc:docChg chg="modSld">
-      <pc:chgData name="Gayathri raj" userId="S::gayathri.r@vit.ac.in::df52d4f3-b744-4c12-a999-b1c829e76304" providerId="AD" clId="Web-{E276D9E6-17BF-4673-AD8E-47A8259076AE}" dt="2022-07-25T03:56:39.633" v="0" actId="20577"/>
-      <pc:docMkLst>
-        <pc:docMk/>
-      </pc:docMkLst>
-      <pc:sldChg chg="modSp">
-        <pc:chgData name="Gayathri raj" userId="S::gayathri.r@vit.ac.in::df52d4f3-b744-4c12-a999-b1c829e76304" providerId="AD" clId="Web-{E276D9E6-17BF-4673-AD8E-47A8259076AE}" dt="2022-07-25T03:56:39.633" v="0" actId="20577"/>
-        <pc:sldMkLst>
-          <pc:docMk/>
-          <pc:sldMk cId="2710566115" sldId="272"/>
-        </pc:sldMkLst>
-        <pc:spChg chg="mod">
-          <ac:chgData name="Gayathri raj" userId="S::gayathri.r@vit.ac.in::df52d4f3-b744-4c12-a999-b1c829e76304" providerId="AD" clId="Web-{E276D9E6-17BF-4673-AD8E-47A8259076AE}" dt="2022-07-25T03:56:39.633" v="0" actId="20577"/>
-          <ac:spMkLst>
-            <pc:docMk/>
-            <pc:sldMk cId="2710566115" sldId="272"/>
-            <ac:spMk id="2" creationId="{00000000-0000-0000-0000-000000000000}"/>
-          </ac:spMkLst>
-        </pc:spChg>
-      </pc:sldChg>
-    </pc:docChg>
-  </pc:docChgLst>
-</pc:chgInfo>
 </file>
 
 <file path=ppt/notesMasters/notesMaster1.xml><?xml version="1.0" encoding="utf-8"?>
@@ -286,7 +233,6 @@
           <a:p>
             <a:fld id="{9781678E-1558-4984-95FD-AEF85653E95B}" type="datetimeFigureOut">
               <a:rPr lang="en-US" smtClean="0"/>
-              <a:t>7/24/2022</a:t>
             </a:fld>
             <a:endParaRPr lang="en-US"/>
           </a:p>
@@ -353,6 +299,7 @@
               <a:rPr lang="en-US"/>
               <a:t>Click to edit Master text styles</a:t>
             </a:r>
+            <a:endParaRPr lang="en-US"/>
           </a:p>
           <a:p>
             <a:pPr lvl="1"/>
@@ -360,6 +307,7 @@
               <a:rPr lang="en-US"/>
               <a:t>Second level</a:t>
             </a:r>
+            <a:endParaRPr lang="en-US"/>
           </a:p>
           <a:p>
             <a:pPr lvl="2"/>
@@ -367,6 +315,7 @@
               <a:rPr lang="en-US"/>
               <a:t>Third level</a:t>
             </a:r>
+            <a:endParaRPr lang="en-US"/>
           </a:p>
           <a:p>
             <a:pPr lvl="3"/>
@@ -374,6 +323,7 @@
               <a:rPr lang="en-US"/>
               <a:t>Fourth level</a:t>
             </a:r>
+            <a:endParaRPr lang="en-US"/>
           </a:p>
           <a:p>
             <a:pPr lvl="4"/>
@@ -381,6 +331,7 @@
               <a:rPr lang="en-US"/>
               <a:t>Fifth level</a:t>
             </a:r>
+            <a:endParaRPr lang="en-US"/>
           </a:p>
         </p:txBody>
       </p:sp>
@@ -444,18 +395,12 @@
           <a:p>
             <a:fld id="{38044316-B964-4554-A8DF-7AC2ABB47B78}" type="slidenum">
               <a:rPr lang="en-US" smtClean="0"/>
-              <a:t>‹#›</a:t>
             </a:fld>
             <a:endParaRPr lang="en-US"/>
           </a:p>
         </p:txBody>
       </p:sp>
     </p:spTree>
-    <p:extLst>
-      <p:ext uri="{BB962C8B-B14F-4D97-AF65-F5344CB8AC3E}">
-        <p14:creationId xmlns:p14="http://schemas.microsoft.com/office/powerpoint/2010/main" val="1010938690"/>
-      </p:ext>
-    </p:extLst>
   </p:cSld>
   <p:clrMap bg1="lt1" tx1="dk1" bg2="lt2" tx2="dk2" accent1="accent1" accent2="accent2" accent3="accent3" accent4="accent4" accent5="accent5" accent6="accent6" hlink="hlink" folHlink="folHlink"/>
   <p:notesStyle>
@@ -618,18 +563,12 @@
           <a:p>
             <a:fld id="{38044316-B964-4554-A8DF-7AC2ABB47B78}" type="slidenum">
               <a:rPr lang="en-US" smtClean="0"/>
-              <a:t>1</a:t>
             </a:fld>
             <a:endParaRPr lang="en-US"/>
           </a:p>
         </p:txBody>
       </p:sp>
     </p:spTree>
-    <p:extLst>
-      <p:ext uri="{BB962C8B-B14F-4D97-AF65-F5344CB8AC3E}">
-        <p14:creationId xmlns:p14="http://schemas.microsoft.com/office/powerpoint/2010/main" val="1636462452"/>
-      </p:ext>
-    </p:extLst>
   </p:cSld>
   <p:clrMapOvr>
     <a:masterClrMapping/>
@@ -686,6 +625,7 @@
               <a:rPr lang="en-US" dirty="0"/>
               <a:t>Click to edit Master title style</a:t>
             </a:r>
+            <a:endParaRPr lang="en-US" dirty="0"/>
           </a:p>
         </p:txBody>
       </p:sp>
@@ -802,6 +742,7 @@
               <a:rPr lang="en-US" dirty="0"/>
               <a:t>Click to edit Master subtitle style</a:t>
             </a:r>
+            <a:endParaRPr lang="en-US" dirty="0"/>
           </a:p>
         </p:txBody>
       </p:sp>
@@ -822,7 +763,6 @@
           <a:p>
             <a:fld id="{0144DEFB-0D57-4F1D-97E5-13AEC74991C0}" type="datetime1">
               <a:rPr lang="en-US" smtClean="0"/>
-              <a:t>7/24/2022</a:t>
             </a:fld>
             <a:endParaRPr lang="en-US"/>
           </a:p>
@@ -868,7 +808,6 @@
           <a:p>
             <a:fld id="{9922EF5B-2A28-4554-A318-1894A92BDB68}" type="slidenum">
               <a:rPr lang="en-US" smtClean="0"/>
-              <a:t>‹#›</a:t>
             </a:fld>
             <a:endParaRPr lang="en-US"/>
           </a:p>
@@ -902,11 +841,7 @@
           </a:extLst>
         </p:spPr>
         <p:txBody>
-          <a:bodyPr vert="horz" wrap="square" lIns="91440" tIns="45720" rIns="91440" bIns="45720" numCol="1" anchor="t" anchorCtr="0" compatLnSpc="1">
-            <a:prstTxWarp prst="textNoShape">
-              <a:avLst/>
-            </a:prstTxWarp>
-          </a:bodyPr>
+          <a:bodyPr vert="horz" wrap="square" lIns="91440" tIns="45720" rIns="91440" bIns="45720" numCol="1" anchor="t" anchorCtr="0" compatLnSpc="1"/>
           <a:lstStyle/>
           <a:p>
             <a:endParaRPr lang="en-US"/>
@@ -941,11 +876,7 @@
           </a:extLst>
         </p:spPr>
         <p:txBody>
-          <a:bodyPr vert="horz" wrap="square" lIns="91440" tIns="45720" rIns="91440" bIns="45720" numCol="1" anchor="t" anchorCtr="0" compatLnSpc="1">
-            <a:prstTxWarp prst="textNoShape">
-              <a:avLst/>
-            </a:prstTxWarp>
-          </a:bodyPr>
+          <a:bodyPr vert="horz" wrap="square" lIns="91440" tIns="45720" rIns="91440" bIns="45720" numCol="1" anchor="t" anchorCtr="0" compatLnSpc="1"/>
           <a:lstStyle/>
           <a:p>
             <a:endParaRPr lang="en-US"/>
@@ -980,11 +911,7 @@
           </a:extLst>
         </p:spPr>
         <p:txBody>
-          <a:bodyPr vert="horz" wrap="square" lIns="91440" tIns="45720" rIns="91440" bIns="45720" numCol="1" anchor="t" anchorCtr="0" compatLnSpc="1">
-            <a:prstTxWarp prst="textNoShape">
-              <a:avLst/>
-            </a:prstTxWarp>
-          </a:bodyPr>
+          <a:bodyPr vert="horz" wrap="square" lIns="91440" tIns="45720" rIns="91440" bIns="45720" numCol="1" anchor="t" anchorCtr="0" compatLnSpc="1"/>
           <a:lstStyle/>
           <a:p>
             <a:endParaRPr lang="en-US"/>
@@ -1019,11 +946,7 @@
           </a:extLst>
         </p:spPr>
         <p:txBody>
-          <a:bodyPr vert="horz" wrap="square" lIns="91440" tIns="45720" rIns="91440" bIns="45720" numCol="1" anchor="t" anchorCtr="0" compatLnSpc="1">
-            <a:prstTxWarp prst="textNoShape">
-              <a:avLst/>
-            </a:prstTxWarp>
-          </a:bodyPr>
+          <a:bodyPr vert="horz" wrap="square" lIns="91440" tIns="45720" rIns="91440" bIns="45720" numCol="1" anchor="t" anchorCtr="0" compatLnSpc="1"/>
           <a:lstStyle/>
           <a:p>
             <a:endParaRPr lang="en-US"/>
@@ -1058,11 +981,7 @@
           </a:extLst>
         </p:spPr>
         <p:txBody>
-          <a:bodyPr vert="horz" wrap="square" lIns="91440" tIns="45720" rIns="91440" bIns="45720" numCol="1" anchor="t" anchorCtr="0" compatLnSpc="1">
-            <a:prstTxWarp prst="textNoShape">
-              <a:avLst/>
-            </a:prstTxWarp>
-          </a:bodyPr>
+          <a:bodyPr vert="horz" wrap="square" lIns="91440" tIns="45720" rIns="91440" bIns="45720" numCol="1" anchor="t" anchorCtr="0" compatLnSpc="1"/>
           <a:lstStyle/>
           <a:p>
             <a:endParaRPr lang="en-US"/>
@@ -1070,11 +989,6 @@
         </p:txBody>
       </p:sp>
     </p:spTree>
-    <p:extLst>
-      <p:ext uri="{BB962C8B-B14F-4D97-AF65-F5344CB8AC3E}">
-        <p14:creationId xmlns:p14="http://schemas.microsoft.com/office/powerpoint/2010/main" val="3113784270"/>
-      </p:ext>
-    </p:extLst>
   </p:cSld>
   <p:clrMapOvr>
     <a:masterClrMapping/>
@@ -1118,6 +1032,7 @@
               <a:rPr lang="en-US"/>
               <a:t>Click to edit Master title style</a:t>
             </a:r>
+            <a:endParaRPr lang="en-US"/>
           </a:p>
         </p:txBody>
       </p:sp>
@@ -1141,6 +1056,7 @@
               <a:rPr lang="en-US"/>
               <a:t>Click to edit Master text styles</a:t>
             </a:r>
+            <a:endParaRPr lang="en-US"/>
           </a:p>
           <a:p>
             <a:pPr lvl="1"/>
@@ -1148,6 +1064,7 @@
               <a:rPr lang="en-US"/>
               <a:t>Second level</a:t>
             </a:r>
+            <a:endParaRPr lang="en-US"/>
           </a:p>
           <a:p>
             <a:pPr lvl="2"/>
@@ -1155,6 +1072,7 @@
               <a:rPr lang="en-US"/>
               <a:t>Third level</a:t>
             </a:r>
+            <a:endParaRPr lang="en-US"/>
           </a:p>
           <a:p>
             <a:pPr lvl="3"/>
@@ -1162,6 +1080,7 @@
               <a:rPr lang="en-US"/>
               <a:t>Fourth level</a:t>
             </a:r>
+            <a:endParaRPr lang="en-US"/>
           </a:p>
           <a:p>
             <a:pPr lvl="4"/>
@@ -1169,6 +1088,7 @@
               <a:rPr lang="en-US"/>
               <a:t>Fifth level</a:t>
             </a:r>
+            <a:endParaRPr lang="en-US"/>
           </a:p>
         </p:txBody>
       </p:sp>
@@ -1189,7 +1109,6 @@
           <a:p>
             <a:fld id="{B8D8BD9B-2B42-4E27-8D61-CF97076BA33D}" type="datetime1">
               <a:rPr lang="en-US" smtClean="0"/>
-              <a:t>7/24/2022</a:t>
             </a:fld>
             <a:endParaRPr lang="en-US"/>
           </a:p>
@@ -1235,18 +1154,12 @@
           <a:p>
             <a:fld id="{9922EF5B-2A28-4554-A318-1894A92BDB68}" type="slidenum">
               <a:rPr lang="en-US" smtClean="0"/>
-              <a:t>‹#›</a:t>
             </a:fld>
             <a:endParaRPr lang="en-US"/>
           </a:p>
         </p:txBody>
       </p:sp>
     </p:spTree>
-    <p:extLst>
-      <p:ext uri="{BB962C8B-B14F-4D97-AF65-F5344CB8AC3E}">
-        <p14:creationId xmlns:p14="http://schemas.microsoft.com/office/powerpoint/2010/main" val="1590707005"/>
-      </p:ext>
-    </p:extLst>
   </p:cSld>
   <p:clrMapOvr>
     <a:masterClrMapping/>
@@ -1295,6 +1208,7 @@
               <a:rPr lang="en-US"/>
               <a:t>Click to edit Master title style</a:t>
             </a:r>
+            <a:endParaRPr lang="en-US"/>
           </a:p>
         </p:txBody>
       </p:sp>
@@ -1323,6 +1237,7 @@
               <a:rPr lang="en-US"/>
               <a:t>Click to edit Master text styles</a:t>
             </a:r>
+            <a:endParaRPr lang="en-US"/>
           </a:p>
           <a:p>
             <a:pPr lvl="1"/>
@@ -1330,6 +1245,7 @@
               <a:rPr lang="en-US"/>
               <a:t>Second level</a:t>
             </a:r>
+            <a:endParaRPr lang="en-US"/>
           </a:p>
           <a:p>
             <a:pPr lvl="2"/>
@@ -1337,6 +1253,7 @@
               <a:rPr lang="en-US"/>
               <a:t>Third level</a:t>
             </a:r>
+            <a:endParaRPr lang="en-US"/>
           </a:p>
           <a:p>
             <a:pPr lvl="3"/>
@@ -1344,6 +1261,7 @@
               <a:rPr lang="en-US"/>
               <a:t>Fourth level</a:t>
             </a:r>
+            <a:endParaRPr lang="en-US"/>
           </a:p>
           <a:p>
             <a:pPr lvl="4"/>
@@ -1351,6 +1269,7 @@
               <a:rPr lang="en-US"/>
               <a:t>Fifth level</a:t>
             </a:r>
+            <a:endParaRPr lang="en-US"/>
           </a:p>
         </p:txBody>
       </p:sp>
@@ -1371,7 +1290,6 @@
           <a:p>
             <a:fld id="{53050898-003C-48C2-8C10-899F362D990B}" type="datetime1">
               <a:rPr lang="en-US" smtClean="0"/>
-              <a:t>7/24/2022</a:t>
             </a:fld>
             <a:endParaRPr lang="en-US"/>
           </a:p>
@@ -1417,18 +1335,12 @@
           <a:p>
             <a:fld id="{9922EF5B-2A28-4554-A318-1894A92BDB68}" type="slidenum">
               <a:rPr lang="en-US" smtClean="0"/>
-              <a:t>‹#›</a:t>
             </a:fld>
             <a:endParaRPr lang="en-US"/>
           </a:p>
         </p:txBody>
       </p:sp>
     </p:spTree>
-    <p:extLst>
-      <p:ext uri="{BB962C8B-B14F-4D97-AF65-F5344CB8AC3E}">
-        <p14:creationId xmlns:p14="http://schemas.microsoft.com/office/powerpoint/2010/main" val="3752313733"/>
-      </p:ext>
-    </p:extLst>
   </p:cSld>
   <p:clrMapOvr>
     <a:masterClrMapping/>
@@ -1472,6 +1384,7 @@
               <a:rPr lang="en-US"/>
               <a:t>Click to edit Master title style</a:t>
             </a:r>
+            <a:endParaRPr lang="en-US"/>
           </a:p>
         </p:txBody>
       </p:sp>
@@ -1495,6 +1408,7 @@
               <a:rPr lang="en-US"/>
               <a:t>Click to edit Master text styles</a:t>
             </a:r>
+            <a:endParaRPr lang="en-US"/>
           </a:p>
           <a:p>
             <a:pPr lvl="1"/>
@@ -1502,6 +1416,7 @@
               <a:rPr lang="en-US"/>
               <a:t>Second level</a:t>
             </a:r>
+            <a:endParaRPr lang="en-US"/>
           </a:p>
           <a:p>
             <a:pPr lvl="2"/>
@@ -1509,6 +1424,7 @@
               <a:rPr lang="en-US"/>
               <a:t>Third level</a:t>
             </a:r>
+            <a:endParaRPr lang="en-US"/>
           </a:p>
           <a:p>
             <a:pPr lvl="3"/>
@@ -1516,6 +1432,7 @@
               <a:rPr lang="en-US"/>
               <a:t>Fourth level</a:t>
             </a:r>
+            <a:endParaRPr lang="en-US"/>
           </a:p>
           <a:p>
             <a:pPr lvl="4"/>
@@ -1523,6 +1440,7 @@
               <a:rPr lang="en-US"/>
               <a:t>Fifth level</a:t>
             </a:r>
+            <a:endParaRPr lang="en-US"/>
           </a:p>
         </p:txBody>
       </p:sp>
@@ -1543,7 +1461,6 @@
           <a:p>
             <a:fld id="{FCA0BF55-C6F8-4BFF-8D9C-FE2A9E0C65F1}" type="datetime1">
               <a:rPr lang="en-US" smtClean="0"/>
-              <a:t>7/24/2022</a:t>
             </a:fld>
             <a:endParaRPr lang="en-US"/>
           </a:p>
@@ -1589,18 +1506,12 @@
           <a:p>
             <a:fld id="{9922EF5B-2A28-4554-A318-1894A92BDB68}" type="slidenum">
               <a:rPr lang="en-US" smtClean="0"/>
-              <a:t>‹#›</a:t>
             </a:fld>
             <a:endParaRPr lang="en-US"/>
           </a:p>
         </p:txBody>
       </p:sp>
     </p:spTree>
-    <p:extLst>
-      <p:ext uri="{BB962C8B-B14F-4D97-AF65-F5344CB8AC3E}">
-        <p14:creationId xmlns:p14="http://schemas.microsoft.com/office/powerpoint/2010/main" val="3684743585"/>
-      </p:ext>
-    </p:extLst>
   </p:cSld>
   <p:clrMapOvr>
     <a:masterClrMapping/>
@@ -1653,6 +1564,7 @@
               <a:rPr lang="en-US"/>
               <a:t>Click to edit Master title style</a:t>
             </a:r>
+            <a:endParaRPr lang="en-US"/>
           </a:p>
         </p:txBody>
       </p:sp>
@@ -1772,6 +1684,7 @@
               <a:rPr lang="en-US"/>
               <a:t>Click to edit Master text styles</a:t>
             </a:r>
+            <a:endParaRPr lang="en-US"/>
           </a:p>
         </p:txBody>
       </p:sp>
@@ -1792,7 +1705,6 @@
           <a:p>
             <a:fld id="{B88D3C30-29B7-4962-B75B-5783640B50E5}" type="datetime1">
               <a:rPr lang="en-US" smtClean="0"/>
-              <a:t>7/24/2022</a:t>
             </a:fld>
             <a:endParaRPr lang="en-US"/>
           </a:p>
@@ -1838,18 +1750,12 @@
           <a:p>
             <a:fld id="{9922EF5B-2A28-4554-A318-1894A92BDB68}" type="slidenum">
               <a:rPr lang="en-US" smtClean="0"/>
-              <a:t>‹#›</a:t>
             </a:fld>
             <a:endParaRPr lang="en-US"/>
           </a:p>
         </p:txBody>
       </p:sp>
     </p:spTree>
-    <p:extLst>
-      <p:ext uri="{BB962C8B-B14F-4D97-AF65-F5344CB8AC3E}">
-        <p14:creationId xmlns:p14="http://schemas.microsoft.com/office/powerpoint/2010/main" val="183891144"/>
-      </p:ext>
-    </p:extLst>
   </p:cSld>
   <p:clrMapOvr>
     <a:masterClrMapping/>
@@ -1893,6 +1799,7 @@
               <a:rPr lang="en-US"/>
               <a:t>Click to edit Master title style</a:t>
             </a:r>
+            <a:endParaRPr lang="en-US"/>
           </a:p>
         </p:txBody>
       </p:sp>
@@ -1949,6 +1856,7 @@
               <a:rPr lang="en-US"/>
               <a:t>Click to edit Master text styles</a:t>
             </a:r>
+            <a:endParaRPr lang="en-US"/>
           </a:p>
           <a:p>
             <a:pPr lvl="1"/>
@@ -1956,6 +1864,7 @@
               <a:rPr lang="en-US"/>
               <a:t>Second level</a:t>
             </a:r>
+            <a:endParaRPr lang="en-US"/>
           </a:p>
           <a:p>
             <a:pPr lvl="2"/>
@@ -1963,6 +1872,7 @@
               <a:rPr lang="en-US"/>
               <a:t>Third level</a:t>
             </a:r>
+            <a:endParaRPr lang="en-US"/>
           </a:p>
           <a:p>
             <a:pPr lvl="3"/>
@@ -1970,6 +1880,7 @@
               <a:rPr lang="en-US"/>
               <a:t>Fourth level</a:t>
             </a:r>
+            <a:endParaRPr lang="en-US"/>
           </a:p>
           <a:p>
             <a:pPr lvl="4"/>
@@ -1977,6 +1888,7 @@
               <a:rPr lang="en-US"/>
               <a:t>Fifth level</a:t>
             </a:r>
+            <a:endParaRPr lang="en-US"/>
           </a:p>
         </p:txBody>
       </p:sp>
@@ -2033,6 +1945,7 @@
               <a:rPr lang="en-US"/>
               <a:t>Click to edit Master text styles</a:t>
             </a:r>
+            <a:endParaRPr lang="en-US"/>
           </a:p>
           <a:p>
             <a:pPr lvl="1"/>
@@ -2040,6 +1953,7 @@
               <a:rPr lang="en-US"/>
               <a:t>Second level</a:t>
             </a:r>
+            <a:endParaRPr lang="en-US"/>
           </a:p>
           <a:p>
             <a:pPr lvl="2"/>
@@ -2047,6 +1961,7 @@
               <a:rPr lang="en-US"/>
               <a:t>Third level</a:t>
             </a:r>
+            <a:endParaRPr lang="en-US"/>
           </a:p>
           <a:p>
             <a:pPr lvl="3"/>
@@ -2054,6 +1969,7 @@
               <a:rPr lang="en-US"/>
               <a:t>Fourth level</a:t>
             </a:r>
+            <a:endParaRPr lang="en-US"/>
           </a:p>
           <a:p>
             <a:pPr lvl="4"/>
@@ -2061,6 +1977,7 @@
               <a:rPr lang="en-US"/>
               <a:t>Fifth level</a:t>
             </a:r>
+            <a:endParaRPr lang="en-US"/>
           </a:p>
         </p:txBody>
       </p:sp>
@@ -2081,7 +1998,6 @@
           <a:p>
             <a:fld id="{42AF7B6E-7A76-4605-8460-39EA0A21C01C}" type="datetime1">
               <a:rPr lang="en-US" smtClean="0"/>
-              <a:t>7/24/2022</a:t>
             </a:fld>
             <a:endParaRPr lang="en-US"/>
           </a:p>
@@ -2127,18 +2043,12 @@
           <a:p>
             <a:fld id="{9922EF5B-2A28-4554-A318-1894A92BDB68}" type="slidenum">
               <a:rPr lang="en-US" smtClean="0"/>
-              <a:t>‹#›</a:t>
             </a:fld>
             <a:endParaRPr lang="en-US"/>
           </a:p>
         </p:txBody>
       </p:sp>
     </p:spTree>
-    <p:extLst>
-      <p:ext uri="{BB962C8B-B14F-4D97-AF65-F5344CB8AC3E}">
-        <p14:creationId xmlns:p14="http://schemas.microsoft.com/office/powerpoint/2010/main" val="365334433"/>
-      </p:ext>
-    </p:extLst>
   </p:cSld>
   <p:clrMapOvr>
     <a:masterClrMapping/>
@@ -2186,6 +2096,7 @@
               <a:rPr lang="en-US"/>
               <a:t>Click to edit Master title style</a:t>
             </a:r>
+            <a:endParaRPr lang="en-US"/>
           </a:p>
         </p:txBody>
       </p:sp>
@@ -2251,6 +2162,7 @@
               <a:rPr lang="en-US"/>
               <a:t>Click to edit Master text styles</a:t>
             </a:r>
+            <a:endParaRPr lang="en-US"/>
           </a:p>
         </p:txBody>
       </p:sp>
@@ -2307,6 +2219,7 @@
               <a:rPr lang="en-US"/>
               <a:t>Click to edit Master text styles</a:t>
             </a:r>
+            <a:endParaRPr lang="en-US"/>
           </a:p>
           <a:p>
             <a:pPr lvl="1"/>
@@ -2314,6 +2227,7 @@
               <a:rPr lang="en-US"/>
               <a:t>Second level</a:t>
             </a:r>
+            <a:endParaRPr lang="en-US"/>
           </a:p>
           <a:p>
             <a:pPr lvl="2"/>
@@ -2321,6 +2235,7 @@
               <a:rPr lang="en-US"/>
               <a:t>Third level</a:t>
             </a:r>
+            <a:endParaRPr lang="en-US"/>
           </a:p>
           <a:p>
             <a:pPr lvl="3"/>
@@ -2328,6 +2243,7 @@
               <a:rPr lang="en-US"/>
               <a:t>Fourth level</a:t>
             </a:r>
+            <a:endParaRPr lang="en-US"/>
           </a:p>
           <a:p>
             <a:pPr lvl="4"/>
@@ -2335,6 +2251,7 @@
               <a:rPr lang="en-US"/>
               <a:t>Fifth level</a:t>
             </a:r>
+            <a:endParaRPr lang="en-US"/>
           </a:p>
         </p:txBody>
       </p:sp>
@@ -2400,6 +2317,7 @@
               <a:rPr lang="en-US"/>
               <a:t>Click to edit Master text styles</a:t>
             </a:r>
+            <a:endParaRPr lang="en-US"/>
           </a:p>
         </p:txBody>
       </p:sp>
@@ -2456,6 +2374,7 @@
               <a:rPr lang="en-US"/>
               <a:t>Click to edit Master text styles</a:t>
             </a:r>
+            <a:endParaRPr lang="en-US"/>
           </a:p>
           <a:p>
             <a:pPr lvl="1"/>
@@ -2463,6 +2382,7 @@
               <a:rPr lang="en-US"/>
               <a:t>Second level</a:t>
             </a:r>
+            <a:endParaRPr lang="en-US"/>
           </a:p>
           <a:p>
             <a:pPr lvl="2"/>
@@ -2470,6 +2390,7 @@
               <a:rPr lang="en-US"/>
               <a:t>Third level</a:t>
             </a:r>
+            <a:endParaRPr lang="en-US"/>
           </a:p>
           <a:p>
             <a:pPr lvl="3"/>
@@ -2477,6 +2398,7 @@
               <a:rPr lang="en-US"/>
               <a:t>Fourth level</a:t>
             </a:r>
+            <a:endParaRPr lang="en-US"/>
           </a:p>
           <a:p>
             <a:pPr lvl="4"/>
@@ -2484,6 +2406,7 @@
               <a:rPr lang="en-US"/>
               <a:t>Fifth level</a:t>
             </a:r>
+            <a:endParaRPr lang="en-US"/>
           </a:p>
         </p:txBody>
       </p:sp>
@@ -2504,7 +2427,6 @@
           <a:p>
             <a:fld id="{7448FF41-C0AC-467C-9853-DF5A53C0A98B}" type="datetime1">
               <a:rPr lang="en-US" smtClean="0"/>
-              <a:t>7/24/2022</a:t>
             </a:fld>
             <a:endParaRPr lang="en-US"/>
           </a:p>
@@ -2550,18 +2472,12 @@
           <a:p>
             <a:fld id="{9922EF5B-2A28-4554-A318-1894A92BDB68}" type="slidenum">
               <a:rPr lang="en-US" smtClean="0"/>
-              <a:t>‹#›</a:t>
             </a:fld>
             <a:endParaRPr lang="en-US"/>
           </a:p>
         </p:txBody>
       </p:sp>
     </p:spTree>
-    <p:extLst>
-      <p:ext uri="{BB962C8B-B14F-4D97-AF65-F5344CB8AC3E}">
-        <p14:creationId xmlns:p14="http://schemas.microsoft.com/office/powerpoint/2010/main" val="4070835828"/>
-      </p:ext>
-    </p:extLst>
   </p:cSld>
   <p:clrMapOvr>
     <a:masterClrMapping/>
@@ -2605,6 +2521,7 @@
               <a:rPr lang="en-US"/>
               <a:t>Click to edit Master title style</a:t>
             </a:r>
+            <a:endParaRPr lang="en-US"/>
           </a:p>
         </p:txBody>
       </p:sp>
@@ -2625,7 +2542,6 @@
           <a:p>
             <a:fld id="{3DD56BE6-3AA5-4C89-AD53-5822ADA85691}" type="datetime1">
               <a:rPr lang="en-US" smtClean="0"/>
-              <a:t>7/24/2022</a:t>
             </a:fld>
             <a:endParaRPr lang="en-US"/>
           </a:p>
@@ -2671,18 +2587,12 @@
           <a:p>
             <a:fld id="{9922EF5B-2A28-4554-A318-1894A92BDB68}" type="slidenum">
               <a:rPr lang="en-US" smtClean="0"/>
-              <a:t>‹#›</a:t>
             </a:fld>
             <a:endParaRPr lang="en-US"/>
           </a:p>
         </p:txBody>
       </p:sp>
     </p:spTree>
-    <p:extLst>
-      <p:ext uri="{BB962C8B-B14F-4D97-AF65-F5344CB8AC3E}">
-        <p14:creationId xmlns:p14="http://schemas.microsoft.com/office/powerpoint/2010/main" val="2533323053"/>
-      </p:ext>
-    </p:extLst>
   </p:cSld>
   <p:clrMapOvr>
     <a:masterClrMapping/>
@@ -2724,7 +2634,6 @@
           <a:p>
             <a:fld id="{DD6AE605-B141-4AFB-B8F0-1A71BFFBA3D8}" type="datetime1">
               <a:rPr lang="en-US" smtClean="0"/>
-              <a:t>7/24/2022</a:t>
             </a:fld>
             <a:endParaRPr lang="en-US"/>
           </a:p>
@@ -2770,18 +2679,12 @@
           <a:p>
             <a:fld id="{9922EF5B-2A28-4554-A318-1894A92BDB68}" type="slidenum">
               <a:rPr lang="en-US" smtClean="0"/>
-              <a:t>‹#›</a:t>
             </a:fld>
             <a:endParaRPr lang="en-US"/>
           </a:p>
         </p:txBody>
       </p:sp>
     </p:spTree>
-    <p:extLst>
-      <p:ext uri="{BB962C8B-B14F-4D97-AF65-F5344CB8AC3E}">
-        <p14:creationId xmlns:p14="http://schemas.microsoft.com/office/powerpoint/2010/main" val="3785273118"/>
-      </p:ext>
-    </p:extLst>
   </p:cSld>
   <p:clrMapOvr>
     <a:masterClrMapping/>
@@ -2834,6 +2737,7 @@
               <a:rPr lang="en-US"/>
               <a:t>Click to edit Master title style</a:t>
             </a:r>
+            <a:endParaRPr lang="en-US"/>
           </a:p>
         </p:txBody>
       </p:sp>
@@ -2890,6 +2794,7 @@
               <a:rPr lang="en-US"/>
               <a:t>Click to edit Master text styles</a:t>
             </a:r>
+            <a:endParaRPr lang="en-US"/>
           </a:p>
           <a:p>
             <a:pPr lvl="1"/>
@@ -2897,6 +2802,7 @@
               <a:rPr lang="en-US"/>
               <a:t>Second level</a:t>
             </a:r>
+            <a:endParaRPr lang="en-US"/>
           </a:p>
           <a:p>
             <a:pPr lvl="2"/>
@@ -2904,6 +2810,7 @@
               <a:rPr lang="en-US"/>
               <a:t>Third level</a:t>
             </a:r>
+            <a:endParaRPr lang="en-US"/>
           </a:p>
           <a:p>
             <a:pPr lvl="3"/>
@@ -2911,6 +2818,7 @@
               <a:rPr lang="en-US"/>
               <a:t>Fourth level</a:t>
             </a:r>
+            <a:endParaRPr lang="en-US"/>
           </a:p>
           <a:p>
             <a:pPr lvl="4"/>
@@ -2918,6 +2826,7 @@
               <a:rPr lang="en-US"/>
               <a:t>Fifth level</a:t>
             </a:r>
+            <a:endParaRPr lang="en-US"/>
           </a:p>
         </p:txBody>
       </p:sp>
@@ -2983,6 +2892,7 @@
               <a:rPr lang="en-US"/>
               <a:t>Click to edit Master text styles</a:t>
             </a:r>
+            <a:endParaRPr lang="en-US"/>
           </a:p>
         </p:txBody>
       </p:sp>
@@ -3003,7 +2913,6 @@
           <a:p>
             <a:fld id="{B12CC11A-0058-4E8A-AF5B-AB607988E8D7}" type="datetime1">
               <a:rPr lang="en-US" smtClean="0"/>
-              <a:t>7/24/2022</a:t>
             </a:fld>
             <a:endParaRPr lang="en-US"/>
           </a:p>
@@ -3049,18 +2958,12 @@
           <a:p>
             <a:fld id="{9922EF5B-2A28-4554-A318-1894A92BDB68}" type="slidenum">
               <a:rPr lang="en-US" smtClean="0"/>
-              <a:t>‹#›</a:t>
             </a:fld>
             <a:endParaRPr lang="en-US"/>
           </a:p>
         </p:txBody>
       </p:sp>
     </p:spTree>
-    <p:extLst>
-      <p:ext uri="{BB962C8B-B14F-4D97-AF65-F5344CB8AC3E}">
-        <p14:creationId xmlns:p14="http://schemas.microsoft.com/office/powerpoint/2010/main" val="2765800790"/>
-      </p:ext>
-    </p:extLst>
   </p:cSld>
   <p:clrMapOvr>
     <a:masterClrMapping/>
@@ -3113,6 +3016,7 @@
               <a:rPr lang="en-US"/>
               <a:t>Click to edit Master title style</a:t>
             </a:r>
+            <a:endParaRPr lang="en-US"/>
           </a:p>
         </p:txBody>
       </p:sp>
@@ -3239,6 +3143,7 @@
               <a:rPr lang="en-US"/>
               <a:t>Click to edit Master text styles</a:t>
             </a:r>
+            <a:endParaRPr lang="en-US"/>
           </a:p>
         </p:txBody>
       </p:sp>
@@ -3259,7 +3164,6 @@
           <a:p>
             <a:fld id="{094FF3AC-3CC4-4FF3-B0D7-4BEA08BA8D57}" type="datetime1">
               <a:rPr lang="en-US" smtClean="0"/>
-              <a:t>7/24/2022</a:t>
             </a:fld>
             <a:endParaRPr lang="en-US"/>
           </a:p>
@@ -3305,18 +3209,12 @@
           <a:p>
             <a:fld id="{9922EF5B-2A28-4554-A318-1894A92BDB68}" type="slidenum">
               <a:rPr lang="en-US" smtClean="0"/>
-              <a:t>‹#›</a:t>
             </a:fld>
             <a:endParaRPr lang="en-US"/>
           </a:p>
         </p:txBody>
       </p:sp>
     </p:spTree>
-    <p:extLst>
-      <p:ext uri="{BB962C8B-B14F-4D97-AF65-F5344CB8AC3E}">
-        <p14:creationId xmlns:p14="http://schemas.microsoft.com/office/powerpoint/2010/main" val="1942296984"/>
-      </p:ext>
-    </p:extLst>
   </p:cSld>
   <p:clrMapOvr>
     <a:masterClrMapping/>
@@ -3474,6 +3372,7 @@
               <a:rPr lang="en-US" dirty="0"/>
               <a:t>Click to edit Master title style</a:t>
             </a:r>
+            <a:endParaRPr lang="en-US" dirty="0"/>
           </a:p>
         </p:txBody>
       </p:sp>
@@ -3507,6 +3406,7 @@
               <a:rPr lang="en-US" dirty="0"/>
               <a:t>Click to edit Master text styles</a:t>
             </a:r>
+            <a:endParaRPr lang="en-US" dirty="0"/>
           </a:p>
           <a:p>
             <a:pPr lvl="1"/>
@@ -3514,6 +3414,7 @@
               <a:rPr lang="en-US" dirty="0"/>
               <a:t>Second level</a:t>
             </a:r>
+            <a:endParaRPr lang="en-US" dirty="0"/>
           </a:p>
           <a:p>
             <a:pPr lvl="2"/>
@@ -3521,6 +3422,7 @@
               <a:rPr lang="en-US" dirty="0"/>
               <a:t>Third level</a:t>
             </a:r>
+            <a:endParaRPr lang="en-US" dirty="0"/>
           </a:p>
           <a:p>
             <a:pPr lvl="3"/>
@@ -3528,6 +3430,7 @@
               <a:rPr lang="en-US" dirty="0"/>
               <a:t>Fourth level</a:t>
             </a:r>
+            <a:endParaRPr lang="en-US" dirty="0"/>
           </a:p>
           <a:p>
             <a:pPr lvl="4"/>
@@ -3535,6 +3438,7 @@
               <a:rPr lang="en-US" dirty="0"/>
               <a:t>Fifth level</a:t>
             </a:r>
+            <a:endParaRPr lang="en-US" dirty="0"/>
           </a:p>
         </p:txBody>
       </p:sp>
@@ -3571,7 +3475,6 @@
           <a:p>
             <a:fld id="{82B37C8B-4B1B-4207-A6C2-8A23DA209E3C}" type="datetime1">
               <a:rPr lang="en-US" smtClean="0"/>
-              <a:t>7/24/2022</a:t>
             </a:fld>
             <a:endParaRPr lang="en-US"/>
           </a:p>
@@ -3649,19 +3552,12 @@
           <a:p>
             <a:fld id="{9922EF5B-2A28-4554-A318-1894A92BDB68}" type="slidenum">
               <a:rPr lang="en-US" smtClean="0"/>
-              <a:pPr/>
-              <a:t>‹#›</a:t>
             </a:fld>
             <a:endParaRPr lang="en-US"/>
           </a:p>
         </p:txBody>
       </p:sp>
     </p:spTree>
-    <p:extLst>
-      <p:ext uri="{BB962C8B-B14F-4D97-AF65-F5344CB8AC3E}">
-        <p14:creationId xmlns:p14="http://schemas.microsoft.com/office/powerpoint/2010/main" val="3748115931"/>
-      </p:ext>
-    </p:extLst>
   </p:cSld>
   <p:clrMap bg1="lt1" tx1="dk1" bg2="lt2" tx2="dk2" accent1="accent1" accent2="accent2" accent3="accent3" accent4="accent4" accent5="accent5" accent6="accent6" hlink="hlink" folHlink="folHlink"/>
   <p:sldLayoutIdLst>
@@ -3700,7 +3596,7 @@
         <a:spcBef>
           <a:spcPct val="20000"/>
         </a:spcBef>
-        <a:buFont typeface="Arial" pitchFamily="34" charset="0"/>
+        <a:buFont typeface="Arial" panose="020B0604020202020204" pitchFamily="34" charset="0"/>
         <a:buChar char="•"/>
         <a:defRPr sz="4000" kern="1200">
           <a:solidFill>
@@ -3715,7 +3611,7 @@
         <a:spcBef>
           <a:spcPct val="20000"/>
         </a:spcBef>
-        <a:buFont typeface="Arial" pitchFamily="34" charset="0"/>
+        <a:buFont typeface="Arial" panose="020B0604020202020204" pitchFamily="34" charset="0"/>
         <a:buChar char="–"/>
         <a:defRPr sz="3200" kern="1200">
           <a:solidFill>
@@ -3730,7 +3626,7 @@
         <a:spcBef>
           <a:spcPct val="20000"/>
         </a:spcBef>
-        <a:buFont typeface="Arial" pitchFamily="34" charset="0"/>
+        <a:buFont typeface="Arial" panose="020B0604020202020204" pitchFamily="34" charset="0"/>
         <a:buChar char="•"/>
         <a:defRPr sz="2800" kern="1200">
           <a:solidFill>
@@ -3745,7 +3641,7 @@
         <a:spcBef>
           <a:spcPct val="20000"/>
         </a:spcBef>
-        <a:buFont typeface="Arial" pitchFamily="34" charset="0"/>
+        <a:buFont typeface="Arial" panose="020B0604020202020204" pitchFamily="34" charset="0"/>
         <a:buChar char="–"/>
         <a:defRPr sz="2400" kern="1200">
           <a:solidFill>
@@ -3760,7 +3656,7 @@
         <a:spcBef>
           <a:spcPct val="20000"/>
         </a:spcBef>
-        <a:buFont typeface="Arial" pitchFamily="34" charset="0"/>
+        <a:buFont typeface="Arial" panose="020B0604020202020204" pitchFamily="34" charset="0"/>
         <a:buChar char="»"/>
         <a:defRPr sz="2400" kern="1200">
           <a:solidFill>
@@ -3775,7 +3671,7 @@
         <a:spcBef>
           <a:spcPct val="20000"/>
         </a:spcBef>
-        <a:buFont typeface="Arial" pitchFamily="34" charset="0"/>
+        <a:buFont typeface="Arial" panose="020B0604020202020204" pitchFamily="34" charset="0"/>
         <a:buChar char="•"/>
         <a:defRPr sz="2000" kern="1200">
           <a:solidFill>
@@ -3790,7 +3686,7 @@
         <a:spcBef>
           <a:spcPct val="20000"/>
         </a:spcBef>
-        <a:buFont typeface="Arial" pitchFamily="34" charset="0"/>
+        <a:buFont typeface="Arial" panose="020B0604020202020204" pitchFamily="34" charset="0"/>
         <a:buChar char="•"/>
         <a:defRPr sz="2000" kern="1200">
           <a:solidFill>
@@ -3805,7 +3701,7 @@
         <a:spcBef>
           <a:spcPct val="20000"/>
         </a:spcBef>
-        <a:buFont typeface="Arial" pitchFamily="34" charset="0"/>
+        <a:buFont typeface="Arial" panose="020B0604020202020204" pitchFamily="34" charset="0"/>
         <a:buChar char="•"/>
         <a:defRPr sz="2000" kern="1200">
           <a:solidFill>
@@ -3820,7 +3716,7 @@
         <a:spcBef>
           <a:spcPct val="20000"/>
         </a:spcBef>
-        <a:buFont typeface="Arial" pitchFamily="34" charset="0"/>
+        <a:buFont typeface="Arial" panose="020B0604020202020204" pitchFamily="34" charset="0"/>
         <a:buChar char="•"/>
         <a:defRPr sz="2000" kern="1200">
           <a:solidFill>
@@ -4012,7 +3908,7 @@
             <a:avLst/>
           </a:prstGeom>
           <a:blipFill>
-            <a:blip r:embed="rId3"/>
+            <a:blip r:embed="rId1"/>
             <a:stretch>
               <a:fillRect/>
             </a:stretch>
@@ -4047,11 +3943,6 @@
         </p:txBody>
       </p:sp>
     </p:spTree>
-    <p:extLst>
-      <p:ext uri="{BB962C8B-B14F-4D97-AF65-F5344CB8AC3E}">
-        <p14:creationId xmlns:p14="http://schemas.microsoft.com/office/powerpoint/2010/main" val="1863145326"/>
-      </p:ext>
-    </p:extLst>
   </p:cSld>
   <p:clrMapOvr>
     <a:masterClrMapping/>
@@ -4120,6 +4011,7 @@
               <a:rPr lang="en-IN" i="1" dirty="0"/>
               <a:t>Instruction-Level Parallelism: </a:t>
             </a:r>
+            <a:endParaRPr lang="en-IN" i="1" dirty="0"/>
           </a:p>
           <a:p>
             <a:pPr lvl="1"/>
@@ -4127,6 +4019,7 @@
               <a:rPr lang="en-IN" dirty="0"/>
               <a:t>Exploit data-level parallelism</a:t>
             </a:r>
+            <a:endParaRPr lang="en-IN" dirty="0"/>
           </a:p>
           <a:p>
             <a:pPr lvl="1"/>
@@ -4134,6 +4027,7 @@
               <a:rPr lang="en-IN" dirty="0"/>
               <a:t>Pipelining</a:t>
             </a:r>
+            <a:endParaRPr lang="en-IN" dirty="0"/>
           </a:p>
           <a:p>
             <a:r>
@@ -4148,6 +4042,7 @@
               <a:rPr lang="en-IN" i="1" dirty="0"/>
               <a:t>Graphic Processor Units (GPUs) </a:t>
             </a:r>
+            <a:endParaRPr lang="en-IN" i="1" dirty="0"/>
           </a:p>
           <a:p>
             <a:pPr lvl="1"/>
@@ -4155,6 +4050,7 @@
               <a:rPr lang="en-IN" dirty="0"/>
               <a:t>Exploit data-level parallelism </a:t>
             </a:r>
+            <a:endParaRPr lang="en-IN" dirty="0"/>
           </a:p>
           <a:p>
             <a:pPr lvl="1"/>
@@ -4162,6 +4058,7 @@
               <a:rPr lang="en-IN" dirty="0"/>
               <a:t>Applies a single instruction to a collection of data in parallel.</a:t>
             </a:r>
+            <a:endParaRPr lang="en-IN" dirty="0"/>
           </a:p>
           <a:p>
             <a:endParaRPr lang="en-US" dirty="0"/>
@@ -4192,11 +4089,6 @@
         </p:txBody>
       </p:sp>
     </p:spTree>
-    <p:extLst>
-      <p:ext uri="{BB962C8B-B14F-4D97-AF65-F5344CB8AC3E}">
-        <p14:creationId xmlns:p14="http://schemas.microsoft.com/office/powerpoint/2010/main" val="331486601"/>
-      </p:ext>
-    </p:extLst>
   </p:cSld>
   <p:clrMapOvr>
     <a:masterClrMapping/>
@@ -4265,6 +4157,7 @@
               <a:rPr lang="en-IN" i="1" dirty="0"/>
               <a:t>Thread-Level Parallelism </a:t>
             </a:r>
+            <a:endParaRPr lang="en-IN" i="1" dirty="0"/>
           </a:p>
           <a:p>
             <a:pPr lvl="1"/>
@@ -4272,6 +4165,7 @@
               <a:rPr lang="en-IN" dirty="0"/>
               <a:t>Exploits either data-level parallelism or task-level parallelism </a:t>
             </a:r>
+            <a:endParaRPr lang="en-IN" dirty="0"/>
           </a:p>
           <a:p>
             <a:pPr lvl="1"/>
@@ -4279,12 +4173,14 @@
               <a:rPr lang="en-IN" dirty="0"/>
               <a:t>Allows for interaction among parallel threads.</a:t>
             </a:r>
+            <a:endParaRPr lang="en-IN" dirty="0"/>
           </a:p>
           <a:p>
             <a:r>
               <a:rPr lang="en-IN" i="1" dirty="0"/>
               <a:t>Request-Level Parallelism</a:t>
             </a:r>
+            <a:endParaRPr lang="en-IN" i="1" dirty="0"/>
           </a:p>
           <a:p>
             <a:pPr lvl="1"/>
@@ -4292,6 +4188,7 @@
               <a:rPr lang="en-IN" dirty="0"/>
               <a:t>Exploits parallelism among largely decoupled tasks</a:t>
             </a:r>
+            <a:endParaRPr lang="en-IN" dirty="0"/>
           </a:p>
           <a:p>
             <a:pPr lvl="1"/>
@@ -4299,6 +4196,7 @@
               <a:rPr lang="en-IN" dirty="0"/>
               <a:t>Specified by the programmer or the operating system.</a:t>
             </a:r>
+            <a:endParaRPr lang="en-IN" dirty="0"/>
           </a:p>
           <a:p>
             <a:endParaRPr lang="en-US" dirty="0"/>
@@ -4329,11 +4227,6 @@
         </p:txBody>
       </p:sp>
     </p:spTree>
-    <p:extLst>
-      <p:ext uri="{BB962C8B-B14F-4D97-AF65-F5344CB8AC3E}">
-        <p14:creationId xmlns:p14="http://schemas.microsoft.com/office/powerpoint/2010/main" val="1644121566"/>
-      </p:ext>
-    </p:extLst>
   </p:cSld>
   <p:clrMapOvr>
     <a:masterClrMapping/>
@@ -4399,23 +4292,25 @@
         </p:spPr>
         <p:txBody>
           <a:bodyPr>
-            <a:normAutofit fontScale="85000" lnSpcReduction="20000"/>
+            <a:noAutofit/>
           </a:bodyPr>
           <a:lstStyle/>
           <a:p>
             <a:r>
-              <a:rPr lang="en-IN" dirty="0"/>
+              <a:rPr lang="en-IN" sz="2800" dirty="0"/>
               <a:t>These 4 ways to support the data-level parallelism and task-level parallelism for hardware [50 years back]. </a:t>
             </a:r>
-          </a:p>
-          <a:p>
-            <a:r>
-              <a:rPr lang="en-IN" dirty="0"/>
+            <a:endParaRPr lang="en-IN" sz="2800" dirty="0"/>
+          </a:p>
+          <a:p>
+            <a:r>
+              <a:rPr lang="en-IN" sz="2800" dirty="0"/>
               <a:t>When Michael Flynn [1966] found a simple classification whose abbreviations we still use today. </a:t>
             </a:r>
-          </a:p>
-          <a:p>
-            <a:endParaRPr lang="en-US" dirty="0"/>
+            <a:endParaRPr lang="en-IN" sz="2800" dirty="0"/>
+          </a:p>
+          <a:p>
+            <a:endParaRPr lang="en-IN" sz="2800" dirty="0"/>
           </a:p>
         </p:txBody>
       </p:sp>
@@ -4498,6 +4393,11 @@
                 </a:rPr>
                 <a:t>SISD</a:t>
               </a:r>
+              <a:endParaRPr lang="en-IN" sz="4400" dirty="0">
+                <a:solidFill>
+                  <a:schemeClr val="bg1"/>
+                </a:solidFill>
+              </a:endParaRPr>
             </a:p>
           </p:txBody>
         </p:sp>
@@ -4543,6 +4443,11 @@
                 </a:rPr>
                 <a:t>SIMD</a:t>
               </a:r>
+              <a:endParaRPr lang="en-IN" sz="4400" dirty="0">
+                <a:solidFill>
+                  <a:schemeClr val="bg1"/>
+                </a:solidFill>
+              </a:endParaRPr>
             </a:p>
           </p:txBody>
         </p:sp>
@@ -4588,6 +4493,11 @@
                 </a:rPr>
                 <a:t>MISD</a:t>
               </a:r>
+              <a:endParaRPr lang="en-IN" sz="4400" dirty="0">
+                <a:solidFill>
+                  <a:schemeClr val="bg1"/>
+                </a:solidFill>
+              </a:endParaRPr>
             </a:p>
           </p:txBody>
         </p:sp>
@@ -4633,16 +4543,16 @@
                 </a:rPr>
                 <a:t>MIMD</a:t>
               </a:r>
+              <a:endParaRPr lang="en-IN" sz="4400" dirty="0">
+                <a:solidFill>
+                  <a:schemeClr val="bg1"/>
+                </a:solidFill>
+              </a:endParaRPr>
             </a:p>
           </p:txBody>
         </p:sp>
       </p:grpSp>
     </p:spTree>
-    <p:extLst>
-      <p:ext uri="{BB962C8B-B14F-4D97-AF65-F5344CB8AC3E}">
-        <p14:creationId xmlns:p14="http://schemas.microsoft.com/office/powerpoint/2010/main" val="242444073"/>
-      </p:ext>
-    </p:extLst>
   </p:cSld>
   <p:clrMapOvr>
     <a:masterClrMapping/>
@@ -4708,35 +4618,39 @@
         </p:spPr>
         <p:txBody>
           <a:bodyPr>
-            <a:normAutofit fontScale="92500" lnSpcReduction="10000"/>
+            <a:noAutofit/>
           </a:bodyPr>
           <a:lstStyle/>
           <a:p>
             <a:r>
-              <a:rPr lang="en-IN" dirty="0"/>
+              <a:rPr lang="en-IN" sz="3200" dirty="0"/>
               <a:t>This category is the uniprocessor. </a:t>
             </a:r>
-          </a:p>
-          <a:p>
-            <a:r>
-              <a:rPr lang="en-IN" dirty="0"/>
+            <a:endParaRPr lang="en-IN" sz="3200" dirty="0"/>
+          </a:p>
+          <a:p>
+            <a:r>
+              <a:rPr lang="en-IN" sz="3200" dirty="0"/>
               <a:t>No exploitation of parallelism</a:t>
             </a:r>
-          </a:p>
-          <a:p>
-            <a:r>
-              <a:rPr lang="en-IN" dirty="0"/>
+            <a:endParaRPr lang="en-IN" sz="3200" dirty="0"/>
+          </a:p>
+          <a:p>
+            <a:r>
+              <a:rPr lang="en-IN" sz="3200" dirty="0"/>
               <a:t>Can have concurrent processing</a:t>
             </a:r>
-          </a:p>
-          <a:p>
-            <a:r>
-              <a:rPr lang="en-IN" dirty="0"/>
+            <a:endParaRPr lang="en-IN" sz="3200" dirty="0"/>
+          </a:p>
+          <a:p>
+            <a:r>
+              <a:rPr lang="en-IN" sz="3200" dirty="0"/>
               <a:t>Pipelined and super scalar processors</a:t>
             </a:r>
-          </a:p>
-          <a:p>
-            <a:endParaRPr lang="en-US" dirty="0"/>
+            <a:endParaRPr lang="en-IN" sz="3200" dirty="0"/>
+          </a:p>
+          <a:p>
+            <a:endParaRPr lang="en-IN" sz="3200" dirty="0"/>
           </a:p>
         </p:txBody>
       </p:sp>
@@ -4777,7 +4691,6 @@
           <a:prstGeom prst="rect">
             <a:avLst/>
           </a:prstGeom>
-          <a:ln/>
         </p:spPr>
         <p:style>
           <a:lnRef idx="0">
@@ -4806,6 +4719,7 @@
               <a:rPr lang="en-IN" sz="3200" dirty="0"/>
               <a:t> </a:t>
             </a:r>
+            <a:endParaRPr lang="en-IN" sz="3200" dirty="0"/>
           </a:p>
           <a:p>
             <a:pPr algn="ctr"/>
@@ -4813,6 +4727,7 @@
               <a:rPr lang="en-IN" sz="2800" dirty="0"/>
               <a:t>STREAM</a:t>
             </a:r>
+            <a:endParaRPr lang="en-IN" sz="2800" dirty="0"/>
           </a:p>
         </p:txBody>
       </p:sp>
@@ -4859,6 +4774,7 @@
               <a:rPr lang="en-IN" sz="2800" dirty="0"/>
               <a:t>DATA</a:t>
             </a:r>
+            <a:endParaRPr lang="en-IN" sz="2800" dirty="0"/>
           </a:p>
           <a:p>
             <a:pPr algn="ctr"/>
@@ -4866,6 +4782,7 @@
               <a:rPr lang="en-IN" sz="2800" dirty="0"/>
               <a:t>STREAM</a:t>
             </a:r>
+            <a:endParaRPr lang="en-IN" sz="2800" dirty="0"/>
           </a:p>
         </p:txBody>
       </p:sp>
@@ -4907,6 +4824,7 @@
               <a:rPr lang="en-IN" dirty="0"/>
               <a:t>Processing Unit</a:t>
             </a:r>
+            <a:endParaRPr lang="en-IN" dirty="0"/>
           </a:p>
         </p:txBody>
       </p:sp>
@@ -5003,11 +4921,6 @@
         </p:txBody>
       </p:sp>
     </p:spTree>
-    <p:extLst>
-      <p:ext uri="{BB962C8B-B14F-4D97-AF65-F5344CB8AC3E}">
-        <p14:creationId xmlns:p14="http://schemas.microsoft.com/office/powerpoint/2010/main" val="157120813"/>
-      </p:ext>
-    </p:extLst>
   </p:cSld>
   <p:clrMapOvr>
     <a:masterClrMapping/>
@@ -5111,7 +5024,6 @@
           <a:prstGeom prst="rect">
             <a:avLst/>
           </a:prstGeom>
-          <a:ln/>
         </p:spPr>
         <p:style>
           <a:lnRef idx="0">
@@ -5136,6 +5048,7 @@
               <a:rPr lang="en-IN" sz="2800" dirty="0"/>
               <a:t>INSTRUCTION STREAM</a:t>
             </a:r>
+            <a:endParaRPr lang="en-IN" sz="2800" dirty="0"/>
           </a:p>
         </p:txBody>
       </p:sp>
@@ -5184,6 +5097,7 @@
               <a:rPr lang="en-IN" sz="2000" dirty="0"/>
               <a:t>DATA</a:t>
             </a:r>
+            <a:endParaRPr lang="en-IN" sz="2000" dirty="0"/>
           </a:p>
           <a:p>
             <a:pPr algn="ctr"/>
@@ -5191,6 +5105,7 @@
               <a:rPr lang="en-IN" sz="2000" dirty="0"/>
               <a:t>STREAM1</a:t>
             </a:r>
+            <a:endParaRPr lang="en-IN" sz="2000" dirty="0"/>
           </a:p>
         </p:txBody>
       </p:sp>
@@ -5237,6 +5152,7 @@
               <a:rPr lang="en-IN" dirty="0"/>
               <a:t>Processing Unit</a:t>
             </a:r>
+            <a:endParaRPr lang="en-IN" dirty="0"/>
           </a:p>
         </p:txBody>
       </p:sp>
@@ -5377,6 +5293,7 @@
               <a:rPr lang="en-IN" sz="2000" dirty="0"/>
               <a:t>DATA</a:t>
             </a:r>
+            <a:endParaRPr lang="en-IN" sz="2000" dirty="0"/>
           </a:p>
           <a:p>
             <a:pPr algn="ctr"/>
@@ -5384,6 +5301,7 @@
               <a:rPr lang="en-IN" sz="2000" dirty="0"/>
               <a:t>STREAM 2</a:t>
             </a:r>
+            <a:endParaRPr lang="en-IN" sz="2000" dirty="0"/>
           </a:p>
         </p:txBody>
       </p:sp>
@@ -5432,6 +5350,7 @@
               <a:rPr lang="en-IN" sz="2000" dirty="0"/>
               <a:t>DATA</a:t>
             </a:r>
+            <a:endParaRPr lang="en-IN" sz="2000" dirty="0"/>
           </a:p>
           <a:p>
             <a:pPr algn="ctr"/>
@@ -5439,6 +5358,7 @@
               <a:rPr lang="en-IN" sz="2000" dirty="0"/>
               <a:t>STREAM 3</a:t>
             </a:r>
+            <a:endParaRPr lang="en-IN" sz="2000" dirty="0"/>
           </a:p>
         </p:txBody>
       </p:sp>
@@ -5575,6 +5495,7 @@
               <a:rPr lang="en-IN" dirty="0"/>
               <a:t>Processing Unit</a:t>
             </a:r>
+            <a:endParaRPr lang="en-IN" dirty="0"/>
           </a:p>
         </p:txBody>
       </p:sp>
@@ -5622,6 +5543,7 @@
               <a:rPr lang="en-IN" dirty="0"/>
               <a:t>Processing Unit</a:t>
             </a:r>
+            <a:endParaRPr lang="en-IN" dirty="0"/>
           </a:p>
         </p:txBody>
       </p:sp>
@@ -5734,7 +5656,6 @@
           <a:solidFill>
             <a:srgbClr val="E12B45"/>
           </a:solidFill>
-          <a:ln/>
         </p:spPr>
         <p:style>
           <a:lnRef idx="0">
@@ -5759,6 +5680,7 @@
               <a:rPr lang="en-IN" dirty="0"/>
               <a:t>DATA</a:t>
             </a:r>
+            <a:endParaRPr lang="en-IN" dirty="0"/>
           </a:p>
         </p:txBody>
       </p:sp>
@@ -5907,11 +5829,6 @@
         </p:txBody>
       </p:sp>
     </p:spTree>
-    <p:extLst>
-      <p:ext uri="{BB962C8B-B14F-4D97-AF65-F5344CB8AC3E}">
-        <p14:creationId xmlns:p14="http://schemas.microsoft.com/office/powerpoint/2010/main" val="3006024751"/>
-      </p:ext>
-    </p:extLst>
   </p:cSld>
   <p:clrMapOvr>
     <a:masterClrMapping/>
@@ -5996,7 +5913,6 @@
           <a:prstGeom prst="rect">
             <a:avLst/>
           </a:prstGeom>
-          <a:ln/>
         </p:spPr>
         <p:style>
           <a:lnRef idx="0">
@@ -6021,6 +5937,7 @@
               <a:rPr lang="en-IN" sz="2800" dirty="0"/>
               <a:t>INSTRUCTION STREAM</a:t>
             </a:r>
+            <a:endParaRPr lang="en-IN" sz="2800" dirty="0"/>
           </a:p>
         </p:txBody>
       </p:sp>
@@ -6069,6 +5986,7 @@
               <a:rPr lang="en-IN" sz="3200" dirty="0"/>
               <a:t>DATA</a:t>
             </a:r>
+            <a:endParaRPr lang="en-IN" sz="3200" dirty="0"/>
           </a:p>
           <a:p>
             <a:pPr algn="ctr"/>
@@ -6076,6 +5994,7 @@
               <a:rPr lang="en-IN" sz="3200" dirty="0"/>
               <a:t>STREAM</a:t>
             </a:r>
+            <a:endParaRPr lang="en-IN" sz="3200" dirty="0"/>
           </a:p>
         </p:txBody>
       </p:sp>
@@ -6122,6 +6041,7 @@
               <a:rPr lang="en-IN" dirty="0"/>
               <a:t>Processing Unit</a:t>
             </a:r>
+            <a:endParaRPr lang="en-IN" dirty="0"/>
           </a:p>
         </p:txBody>
       </p:sp>
@@ -6350,6 +6270,7 @@
               <a:rPr lang="en-IN" dirty="0"/>
               <a:t>Processing Unit</a:t>
             </a:r>
+            <a:endParaRPr lang="en-IN" dirty="0"/>
           </a:p>
         </p:txBody>
       </p:sp>
@@ -6397,6 +6318,7 @@
               <a:rPr lang="en-IN" dirty="0"/>
               <a:t>Processing Unit</a:t>
             </a:r>
+            <a:endParaRPr lang="en-IN" dirty="0"/>
           </a:p>
         </p:txBody>
       </p:sp>
@@ -6530,6 +6452,7 @@
               <a:rPr lang="en-IN" dirty="0"/>
               <a:t>InstructionStream1</a:t>
             </a:r>
+            <a:endParaRPr lang="en-IN" dirty="0"/>
           </a:p>
         </p:txBody>
       </p:sp>
@@ -6571,6 +6494,7 @@
               <a:rPr lang="en-IN" dirty="0"/>
               <a:t>InstructionStream2</a:t>
             </a:r>
+            <a:endParaRPr lang="en-IN" dirty="0"/>
           </a:p>
         </p:txBody>
       </p:sp>
@@ -6612,6 +6536,7 @@
               <a:rPr lang="en-IN" dirty="0"/>
               <a:t>InstructionStream3</a:t>
             </a:r>
+            <a:endParaRPr lang="en-IN" dirty="0"/>
           </a:p>
         </p:txBody>
       </p:sp>
@@ -6745,11 +6670,6 @@
         </p:txBody>
       </p:sp>
     </p:spTree>
-    <p:extLst>
-      <p:ext uri="{BB962C8B-B14F-4D97-AF65-F5344CB8AC3E}">
-        <p14:creationId xmlns:p14="http://schemas.microsoft.com/office/powerpoint/2010/main" val="4126986539"/>
-      </p:ext>
-    </p:extLst>
   </p:cSld>
   <p:clrMapOvr>
     <a:masterClrMapping/>
@@ -6793,6 +6713,7 @@
               <a:rPr lang="en-US" dirty="0"/>
               <a:t>MIMD</a:t>
             </a:r>
+            <a:endParaRPr lang="en-US" dirty="0"/>
           </a:p>
         </p:txBody>
       </p:sp>
@@ -6852,7 +6773,6 @@
           <a:prstGeom prst="rect">
             <a:avLst/>
           </a:prstGeom>
-          <a:ln/>
         </p:spPr>
         <p:style>
           <a:lnRef idx="0">
@@ -6877,6 +6797,7 @@
               <a:rPr lang="en-IN" sz="2800" dirty="0"/>
               <a:t>INSTRUCTION STREAM</a:t>
             </a:r>
+            <a:endParaRPr lang="en-IN" sz="2800" dirty="0"/>
           </a:p>
         </p:txBody>
       </p:sp>
@@ -6923,6 +6844,7 @@
               <a:rPr lang="en-IN" dirty="0"/>
               <a:t>Processing Unit</a:t>
             </a:r>
+            <a:endParaRPr lang="en-IN" dirty="0"/>
           </a:p>
         </p:txBody>
       </p:sp>
@@ -7013,6 +6935,7 @@
               <a:rPr lang="en-IN" dirty="0"/>
               <a:t>Processing Unit</a:t>
             </a:r>
+            <a:endParaRPr lang="en-IN" dirty="0"/>
           </a:p>
         </p:txBody>
       </p:sp>
@@ -7060,6 +6983,7 @@
               <a:rPr lang="en-IN" dirty="0"/>
               <a:t>Processing Unit</a:t>
             </a:r>
+            <a:endParaRPr lang="en-IN" dirty="0"/>
           </a:p>
         </p:txBody>
       </p:sp>
@@ -7193,6 +7117,7 @@
               <a:rPr lang="en-IN" dirty="0"/>
               <a:t>InstructionStream1</a:t>
             </a:r>
+            <a:endParaRPr lang="en-IN" dirty="0"/>
           </a:p>
         </p:txBody>
       </p:sp>
@@ -7234,6 +7159,7 @@
               <a:rPr lang="en-IN" dirty="0"/>
               <a:t>InstructionStream2</a:t>
             </a:r>
+            <a:endParaRPr lang="en-IN" dirty="0"/>
           </a:p>
         </p:txBody>
       </p:sp>
@@ -7275,6 +7201,7 @@
               <a:rPr lang="en-IN" dirty="0"/>
               <a:t>InstructionStream3</a:t>
             </a:r>
+            <a:endParaRPr lang="en-IN" dirty="0"/>
           </a:p>
         </p:txBody>
       </p:sp>
@@ -7366,6 +7293,7 @@
               <a:rPr lang="en-IN" sz="2000" dirty="0"/>
               <a:t>DATA</a:t>
             </a:r>
+            <a:endParaRPr lang="en-IN" sz="2000" dirty="0"/>
           </a:p>
           <a:p>
             <a:pPr algn="ctr"/>
@@ -7373,6 +7301,7 @@
               <a:rPr lang="en-IN" sz="2000" dirty="0"/>
               <a:t>STREAM1</a:t>
             </a:r>
+            <a:endParaRPr lang="en-IN" sz="2000" dirty="0"/>
           </a:p>
         </p:txBody>
       </p:sp>
@@ -7467,6 +7396,7 @@
               <a:rPr lang="en-IN" sz="2000" dirty="0"/>
               <a:t>DATA</a:t>
             </a:r>
+            <a:endParaRPr lang="en-IN" sz="2000" dirty="0"/>
           </a:p>
           <a:p>
             <a:pPr algn="ctr"/>
@@ -7474,6 +7404,7 @@
               <a:rPr lang="en-IN" sz="2000" dirty="0"/>
               <a:t>STREAM 2</a:t>
             </a:r>
+            <a:endParaRPr lang="en-IN" sz="2000" dirty="0"/>
           </a:p>
         </p:txBody>
       </p:sp>
@@ -7522,6 +7453,7 @@
               <a:rPr lang="en-IN" sz="2000" dirty="0"/>
               <a:t>DATA</a:t>
             </a:r>
+            <a:endParaRPr lang="en-IN" sz="2000" dirty="0"/>
           </a:p>
           <a:p>
             <a:pPr algn="ctr"/>
@@ -7529,6 +7461,7 @@
               <a:rPr lang="en-IN" sz="2000" dirty="0"/>
               <a:t>STREAM 3</a:t>
             </a:r>
+            <a:endParaRPr lang="en-IN" sz="2000" dirty="0"/>
           </a:p>
         </p:txBody>
       </p:sp>
@@ -7641,7 +7574,6 @@
           <a:solidFill>
             <a:srgbClr val="E12B45"/>
           </a:solidFill>
-          <a:ln/>
         </p:spPr>
         <p:style>
           <a:lnRef idx="0">
@@ -7666,6 +7598,7 @@
               <a:rPr lang="en-IN" dirty="0"/>
               <a:t>DATA</a:t>
             </a:r>
+            <a:endParaRPr lang="en-IN" dirty="0"/>
           </a:p>
         </p:txBody>
       </p:sp>
@@ -7900,11 +7833,6 @@
         </p:txBody>
       </p:sp>
     </p:spTree>
-    <p:extLst>
-      <p:ext uri="{BB962C8B-B14F-4D97-AF65-F5344CB8AC3E}">
-        <p14:creationId xmlns:p14="http://schemas.microsoft.com/office/powerpoint/2010/main" val="767428707"/>
-      </p:ext>
-    </p:extLst>
   </p:cSld>
   <p:clrMapOvr>
     <a:masterClrMapping/>
@@ -7971,18 +7899,21 @@
               <a:rPr lang="en-IN" dirty="0"/>
               <a:t>Factors limit parallel execution</a:t>
             </a:r>
+            <a:endParaRPr lang="en-IN" dirty="0"/>
           </a:p>
           <a:p>
             <a:r>
               <a:rPr lang="en-IN" dirty="0"/>
               <a:t>Scalability metrics</a:t>
             </a:r>
+            <a:endParaRPr lang="en-IN" dirty="0"/>
           </a:p>
           <a:p>
             <a:r>
               <a:rPr lang="en-IN" dirty="0"/>
               <a:t>Scalability Laws:</a:t>
             </a:r>
+            <a:endParaRPr lang="en-IN" dirty="0"/>
           </a:p>
           <a:p>
             <a:pPr lvl="1"/>
@@ -7990,6 +7921,7 @@
               <a:rPr lang="en-IN" dirty="0"/>
               <a:t>Amdahl’s Law</a:t>
             </a:r>
+            <a:endParaRPr lang="en-IN" dirty="0"/>
           </a:p>
           <a:p>
             <a:pPr lvl="1"/>
@@ -7997,12 +7929,14 @@
               <a:rPr lang="en-IN" dirty="0"/>
               <a:t>Gustafson’s Law</a:t>
             </a:r>
+            <a:endParaRPr lang="en-IN" dirty="0"/>
           </a:p>
           <a:p>
             <a:r>
               <a:rPr lang="en-IN" dirty="0"/>
               <a:t>Parallel efficiency</a:t>
             </a:r>
+            <a:endParaRPr lang="en-IN" dirty="0"/>
           </a:p>
           <a:p>
             <a:endParaRPr lang="en-US" dirty="0"/>
@@ -8033,11 +7967,6 @@
         </p:txBody>
       </p:sp>
     </p:spTree>
-    <p:extLst>
-      <p:ext uri="{BB962C8B-B14F-4D97-AF65-F5344CB8AC3E}">
-        <p14:creationId xmlns:p14="http://schemas.microsoft.com/office/powerpoint/2010/main" val="2710566115"/>
-      </p:ext>
-    </p:extLst>
   </p:cSld>
   <p:clrMapOvr>
     <a:masterClrMapping/>
@@ -8175,6 +8104,7 @@
               <a:rPr lang="en-IN" dirty="0"/>
               <a:t>1</a:t>
             </a:r>
+            <a:endParaRPr lang="en-IN" dirty="0"/>
           </a:p>
         </p:txBody>
       </p:sp>
@@ -8226,6 +8156,7 @@
               <a:rPr lang="en-IN" dirty="0"/>
               <a:t>3</a:t>
             </a:r>
+            <a:endParaRPr lang="en-IN" dirty="0"/>
           </a:p>
         </p:txBody>
       </p:sp>
@@ -8277,6 +8208,7 @@
               <a:rPr lang="en-IN" dirty="0"/>
               <a:t>4</a:t>
             </a:r>
+            <a:endParaRPr lang="en-IN" dirty="0"/>
           </a:p>
         </p:txBody>
       </p:sp>
@@ -8328,6 +8260,7 @@
               <a:rPr lang="en-IN" dirty="0"/>
               <a:t>5</a:t>
             </a:r>
+            <a:endParaRPr lang="en-IN" dirty="0"/>
           </a:p>
         </p:txBody>
       </p:sp>
@@ -8379,6 +8312,7 @@
               <a:rPr lang="en-IN" dirty="0"/>
               <a:t>6</a:t>
             </a:r>
+            <a:endParaRPr lang="en-IN" dirty="0"/>
           </a:p>
         </p:txBody>
       </p:sp>
@@ -8430,6 +8364,7 @@
               <a:rPr lang="en-IN" dirty="0"/>
               <a:t>7</a:t>
             </a:r>
+            <a:endParaRPr lang="en-IN" dirty="0"/>
           </a:p>
         </p:txBody>
       </p:sp>
@@ -8481,6 +8416,7 @@
               <a:rPr lang="en-IN" b="1" dirty="0"/>
               <a:t>2</a:t>
             </a:r>
+            <a:endParaRPr lang="en-IN" b="1" dirty="0"/>
           </a:p>
         </p:txBody>
       </p:sp>
@@ -8532,6 +8468,7 @@
               <a:rPr lang="en-IN" dirty="0"/>
               <a:t>12</a:t>
             </a:r>
+            <a:endParaRPr lang="en-IN" dirty="0"/>
           </a:p>
         </p:txBody>
       </p:sp>
@@ -8583,6 +8520,7 @@
               <a:rPr lang="en-IN" dirty="0"/>
               <a:t>11</a:t>
             </a:r>
+            <a:endParaRPr lang="en-IN" dirty="0"/>
           </a:p>
         </p:txBody>
       </p:sp>
@@ -8634,6 +8572,7 @@
               <a:rPr lang="en-IN" dirty="0"/>
               <a:t>10</a:t>
             </a:r>
+            <a:endParaRPr lang="en-IN" dirty="0"/>
           </a:p>
         </p:txBody>
       </p:sp>
@@ -8685,6 +8624,7 @@
               <a:rPr lang="en-IN" dirty="0"/>
               <a:t>9</a:t>
             </a:r>
+            <a:endParaRPr lang="en-IN" dirty="0"/>
           </a:p>
         </p:txBody>
       </p:sp>
@@ -8736,6 +8676,7 @@
               <a:rPr lang="en-IN" dirty="0"/>
               <a:t>8</a:t>
             </a:r>
+            <a:endParaRPr lang="en-IN" dirty="0"/>
           </a:p>
         </p:txBody>
       </p:sp>
@@ -9227,6 +9168,7 @@
               <a:rPr lang="en-IN" dirty="0"/>
               <a:t>1</a:t>
             </a:r>
+            <a:endParaRPr lang="en-IN" dirty="0"/>
           </a:p>
         </p:txBody>
       </p:sp>
@@ -9278,6 +9220,7 @@
               <a:rPr lang="en-IN" dirty="0"/>
               <a:t>3</a:t>
             </a:r>
+            <a:endParaRPr lang="en-IN" dirty="0"/>
           </a:p>
         </p:txBody>
       </p:sp>
@@ -9329,6 +9272,7 @@
               <a:rPr lang="en-IN" dirty="0"/>
               <a:t>4</a:t>
             </a:r>
+            <a:endParaRPr lang="en-IN" dirty="0"/>
           </a:p>
         </p:txBody>
       </p:sp>
@@ -9380,6 +9324,7 @@
               <a:rPr lang="en-IN" b="1" dirty="0"/>
               <a:t>2</a:t>
             </a:r>
+            <a:endParaRPr lang="en-IN" b="1" dirty="0"/>
           </a:p>
         </p:txBody>
       </p:sp>
@@ -9551,6 +9496,7 @@
               <a:rPr lang="en-IN" dirty="0"/>
               <a:t>5</a:t>
             </a:r>
+            <a:endParaRPr lang="en-IN" dirty="0"/>
           </a:p>
         </p:txBody>
       </p:sp>
@@ -9602,6 +9548,7 @@
               <a:rPr lang="en-IN" dirty="0"/>
               <a:t>6</a:t>
             </a:r>
+            <a:endParaRPr lang="en-IN" dirty="0"/>
           </a:p>
         </p:txBody>
       </p:sp>
@@ -9653,6 +9600,7 @@
               <a:rPr lang="en-IN" dirty="0"/>
               <a:t>7</a:t>
             </a:r>
+            <a:endParaRPr lang="en-IN" dirty="0"/>
           </a:p>
         </p:txBody>
       </p:sp>
@@ -9704,6 +9652,7 @@
               <a:rPr lang="en-IN" dirty="0"/>
               <a:t>8</a:t>
             </a:r>
+            <a:endParaRPr lang="en-IN" dirty="0"/>
           </a:p>
         </p:txBody>
       </p:sp>
@@ -9875,6 +9824,7 @@
               <a:rPr lang="en-IN" dirty="0"/>
               <a:t>12</a:t>
             </a:r>
+            <a:endParaRPr lang="en-IN" dirty="0"/>
           </a:p>
         </p:txBody>
       </p:sp>
@@ -9926,6 +9876,7 @@
               <a:rPr lang="en-IN" dirty="0"/>
               <a:t>11</a:t>
             </a:r>
+            <a:endParaRPr lang="en-IN" dirty="0"/>
           </a:p>
         </p:txBody>
       </p:sp>
@@ -9977,6 +9928,7 @@
               <a:rPr lang="en-IN" dirty="0"/>
               <a:t>10</a:t>
             </a:r>
+            <a:endParaRPr lang="en-IN" dirty="0"/>
           </a:p>
         </p:txBody>
       </p:sp>
@@ -10028,6 +9980,7 @@
               <a:rPr lang="en-IN" dirty="0"/>
               <a:t>9</a:t>
             </a:r>
+            <a:endParaRPr lang="en-IN" dirty="0"/>
           </a:p>
         </p:txBody>
       </p:sp>
@@ -10177,6 +10130,7 @@
               <a:rPr lang="en-IN" sz="2000" b="1" dirty="0"/>
               <a:t>W1</a:t>
             </a:r>
+            <a:endParaRPr lang="en-IN" sz="2000" b="1" dirty="0"/>
           </a:p>
         </p:txBody>
       </p:sp>
@@ -10206,6 +10160,7 @@
               <a:rPr lang="en-IN" sz="2000" b="1" dirty="0"/>
               <a:t>W2</a:t>
             </a:r>
+            <a:endParaRPr lang="en-IN" sz="2000" b="1" dirty="0"/>
           </a:p>
         </p:txBody>
       </p:sp>
@@ -10235,6 +10190,7 @@
               <a:rPr lang="en-IN" sz="2000" b="1" dirty="0"/>
               <a:t>W3</a:t>
             </a:r>
+            <a:endParaRPr lang="en-IN" sz="2000" b="1" dirty="0"/>
           </a:p>
         </p:txBody>
       </p:sp>
@@ -10314,6 +10270,7 @@
               <a:rPr lang="en-IN" b="1" dirty="0"/>
               <a:t>Time</a:t>
             </a:r>
+            <a:endParaRPr lang="en-IN" b="1" dirty="0"/>
           </a:p>
         </p:txBody>
       </p:sp>
@@ -10393,6 +10350,7 @@
               <a:rPr lang="en-IN" b="1" dirty="0"/>
               <a:t>Time</a:t>
             </a:r>
+            <a:endParaRPr lang="en-IN" b="1" dirty="0"/>
           </a:p>
         </p:txBody>
       </p:sp>
@@ -10432,6 +10390,7 @@
               <a:rPr lang="en-IN" sz="2400" b="1" dirty="0"/>
               <a:t>Sequence of tasks that needs to be parallelized</a:t>
             </a:r>
+            <a:endParaRPr lang="en-IN" sz="2400" b="1" dirty="0"/>
           </a:p>
           <a:p>
             <a:r>
@@ -10448,15 +10407,11 @@
               <a:rPr lang="en-IN" sz="2400" b="1" dirty="0"/>
               <a:t>3 workers (W1,W2,W3) are used to parallelize the tasks  with the time reduction</a:t>
             </a:r>
+            <a:endParaRPr lang="en-IN" sz="2400" b="1" dirty="0"/>
           </a:p>
         </p:txBody>
       </p:sp>
     </p:spTree>
-    <p:extLst>
-      <p:ext uri="{BB962C8B-B14F-4D97-AF65-F5344CB8AC3E}">
-        <p14:creationId xmlns:p14="http://schemas.microsoft.com/office/powerpoint/2010/main" val="1107104290"/>
-      </p:ext>
-    </p:extLst>
   </p:cSld>
   <p:clrMapOvr>
     <a:masterClrMapping/>
@@ -10521,30 +10476,35 @@
               <a:rPr lang="en-IN" dirty="0"/>
               <a:t>But it will not be true and the factor is load imbalance</a:t>
             </a:r>
+            <a:endParaRPr lang="en-IN" dirty="0"/>
           </a:p>
           <a:p>
             <a:r>
               <a:rPr lang="en-IN" dirty="0"/>
               <a:t>Some of the resources will be under utilized </a:t>
             </a:r>
+            <a:endParaRPr lang="en-IN" dirty="0"/>
           </a:p>
           <a:p>
             <a:r>
               <a:rPr lang="en-IN" dirty="0"/>
               <a:t>Communication between co-workers</a:t>
             </a:r>
+            <a:endParaRPr lang="en-IN" dirty="0"/>
           </a:p>
           <a:p>
             <a:r>
               <a:rPr lang="en-IN" dirty="0"/>
               <a:t>Tools to be shared by the co-workers</a:t>
             </a:r>
+            <a:endParaRPr lang="en-IN" dirty="0"/>
           </a:p>
           <a:p>
             <a:r>
               <a:rPr lang="en-IN" dirty="0"/>
               <a:t>These factors will add overhead which will serialize some part of parallel execution </a:t>
             </a:r>
+            <a:endParaRPr lang="en-IN" dirty="0"/>
           </a:p>
           <a:p>
             <a:endParaRPr lang="en-US" dirty="0"/>
@@ -10575,11 +10535,6 @@
         </p:txBody>
       </p:sp>
     </p:spTree>
-    <p:extLst>
-      <p:ext uri="{BB962C8B-B14F-4D97-AF65-F5344CB8AC3E}">
-        <p14:creationId xmlns:p14="http://schemas.microsoft.com/office/powerpoint/2010/main" val="735959114"/>
-      </p:ext>
-    </p:extLst>
   </p:cSld>
   <p:clrMapOvr>
     <a:masterClrMapping/>
@@ -10623,6 +10578,7 @@
               <a:rPr lang="en-US" dirty="0"/>
               <a:t>Outline</a:t>
             </a:r>
+            <a:endParaRPr lang="en-US" dirty="0"/>
           </a:p>
         </p:txBody>
       </p:sp>
@@ -10647,36 +10603,42 @@
               <a:rPr lang="en-IN" dirty="0"/>
               <a:t>Motivation </a:t>
             </a:r>
+            <a:endParaRPr lang="en-IN" dirty="0"/>
           </a:p>
           <a:p>
             <a:r>
               <a:rPr lang="en-IN" dirty="0"/>
               <a:t>Key Concepts </a:t>
             </a:r>
+            <a:endParaRPr lang="en-IN" dirty="0"/>
           </a:p>
           <a:p>
             <a:r>
               <a:rPr lang="en-IN" dirty="0"/>
               <a:t>Challenges </a:t>
             </a:r>
+            <a:endParaRPr lang="en-IN" dirty="0"/>
           </a:p>
           <a:p>
             <a:r>
               <a:rPr lang="en-IN" dirty="0"/>
               <a:t>Parallel computing</a:t>
             </a:r>
+            <a:endParaRPr lang="en-IN" dirty="0"/>
           </a:p>
           <a:p>
             <a:r>
               <a:rPr lang="en-IN" dirty="0"/>
               <a:t>Flynn‘s Taxonomy</a:t>
             </a:r>
+            <a:endParaRPr lang="en-IN" dirty="0"/>
           </a:p>
           <a:p>
             <a:r>
               <a:rPr lang="en-IN" dirty="0"/>
               <a:t>Multi-core Processors,</a:t>
             </a:r>
+            <a:endParaRPr lang="en-IN" dirty="0"/>
           </a:p>
           <a:p>
             <a:r>
@@ -10691,6 +10653,7 @@
               <a:rPr lang="en-IN" dirty="0"/>
               <a:t> Distributed memory.</a:t>
             </a:r>
+            <a:endParaRPr lang="en-IN" dirty="0"/>
           </a:p>
           <a:p>
             <a:endParaRPr lang="en-US" dirty="0"/>
@@ -10721,11 +10684,6 @@
         </p:txBody>
       </p:sp>
     </p:spTree>
-    <p:extLst>
-      <p:ext uri="{BB962C8B-B14F-4D97-AF65-F5344CB8AC3E}">
-        <p14:creationId xmlns:p14="http://schemas.microsoft.com/office/powerpoint/2010/main" val="3311784747"/>
-      </p:ext>
-    </p:extLst>
   </p:cSld>
   <p:clrMapOvr>
     <a:masterClrMapping/>
@@ -10799,12 +10757,14 @@
               <a:rPr lang="en-IN" dirty="0"/>
               <a:t>Tasks will be executed by the workers at different speeds because of load imbalance</a:t>
             </a:r>
+            <a:endParaRPr lang="en-IN" dirty="0"/>
           </a:p>
           <a:p>
             <a:r>
               <a:rPr lang="en-IN" dirty="0"/>
               <a:t>Regions indicate that unused regions</a:t>
             </a:r>
+            <a:endParaRPr lang="en-IN" dirty="0"/>
           </a:p>
           <a:p>
             <a:endParaRPr lang="en-US" dirty="0"/>
@@ -10882,6 +10842,7 @@
               <a:rPr lang="en-IN" dirty="0"/>
               <a:t>1</a:t>
             </a:r>
+            <a:endParaRPr lang="en-IN" dirty="0"/>
           </a:p>
         </p:txBody>
       </p:sp>
@@ -10933,6 +10894,7 @@
               <a:rPr lang="en-IN" dirty="0"/>
               <a:t>3</a:t>
             </a:r>
+            <a:endParaRPr lang="en-IN" dirty="0"/>
           </a:p>
         </p:txBody>
       </p:sp>
@@ -10984,6 +10946,7 @@
               <a:rPr lang="en-IN" dirty="0"/>
               <a:t>4</a:t>
             </a:r>
+            <a:endParaRPr lang="en-IN" dirty="0"/>
           </a:p>
         </p:txBody>
       </p:sp>
@@ -11035,6 +10998,7 @@
               <a:rPr lang="en-IN" b="1" dirty="0"/>
               <a:t>2</a:t>
             </a:r>
+            <a:endParaRPr lang="en-IN" b="1" dirty="0"/>
           </a:p>
         </p:txBody>
       </p:sp>
@@ -11206,6 +11170,7 @@
               <a:rPr lang="en-IN" dirty="0"/>
               <a:t>5</a:t>
             </a:r>
+            <a:endParaRPr lang="en-IN" dirty="0"/>
           </a:p>
         </p:txBody>
       </p:sp>
@@ -11257,6 +11222,7 @@
               <a:rPr lang="en-IN" dirty="0"/>
               <a:t>6</a:t>
             </a:r>
+            <a:endParaRPr lang="en-IN" dirty="0"/>
           </a:p>
         </p:txBody>
       </p:sp>
@@ -11308,6 +11274,7 @@
               <a:rPr lang="en-IN" dirty="0"/>
               <a:t>7</a:t>
             </a:r>
+            <a:endParaRPr lang="en-IN" dirty="0"/>
           </a:p>
         </p:txBody>
       </p:sp>
@@ -11359,6 +11326,7 @@
               <a:rPr lang="en-IN" dirty="0"/>
               <a:t>8</a:t>
             </a:r>
+            <a:endParaRPr lang="en-IN" dirty="0"/>
           </a:p>
         </p:txBody>
       </p:sp>
@@ -11530,6 +11498,7 @@
               <a:rPr lang="en-IN" dirty="0"/>
               <a:t>12</a:t>
             </a:r>
+            <a:endParaRPr lang="en-IN" dirty="0"/>
           </a:p>
         </p:txBody>
       </p:sp>
@@ -11581,6 +11550,7 @@
               <a:rPr lang="en-IN" dirty="0"/>
               <a:t>11</a:t>
             </a:r>
+            <a:endParaRPr lang="en-IN" dirty="0"/>
           </a:p>
         </p:txBody>
       </p:sp>
@@ -11632,6 +11602,7 @@
               <a:rPr lang="en-IN" dirty="0"/>
               <a:t>10</a:t>
             </a:r>
+            <a:endParaRPr lang="en-IN" dirty="0"/>
           </a:p>
         </p:txBody>
       </p:sp>
@@ -11683,6 +11654,7 @@
               <a:rPr lang="en-IN" dirty="0"/>
               <a:t>9</a:t>
             </a:r>
+            <a:endParaRPr lang="en-IN" dirty="0"/>
           </a:p>
         </p:txBody>
       </p:sp>
@@ -11832,6 +11804,7 @@
               <a:rPr lang="en-IN" sz="2000" b="1" dirty="0"/>
               <a:t>W1</a:t>
             </a:r>
+            <a:endParaRPr lang="en-IN" sz="2000" b="1" dirty="0"/>
           </a:p>
         </p:txBody>
       </p:sp>
@@ -11861,6 +11834,7 @@
               <a:rPr lang="en-IN" sz="2000" b="1" dirty="0"/>
               <a:t>W2</a:t>
             </a:r>
+            <a:endParaRPr lang="en-IN" sz="2000" b="1" dirty="0"/>
           </a:p>
         </p:txBody>
       </p:sp>
@@ -11890,6 +11864,7 @@
               <a:rPr lang="en-IN" sz="2000" b="1" dirty="0"/>
               <a:t>W3</a:t>
             </a:r>
+            <a:endParaRPr lang="en-IN" sz="2000" b="1" dirty="0"/>
           </a:p>
         </p:txBody>
       </p:sp>
@@ -11969,6 +11944,7 @@
               <a:rPr lang="en-IN" b="1" dirty="0"/>
               <a:t>Time</a:t>
             </a:r>
+            <a:endParaRPr lang="en-IN" b="1" dirty="0"/>
           </a:p>
         </p:txBody>
       </p:sp>
@@ -11987,7 +11963,7 @@
             <a:avLst/>
           </a:prstGeom>
           <a:blipFill>
-            <a:blip r:embed="rId2"/>
+            <a:blip r:embed="rId1"/>
             <a:tile tx="0" ty="0" sx="100000" sy="100000" flip="none" algn="tl"/>
           </a:blipFill>
           <a:ln>
@@ -12034,7 +12010,7 @@
             <a:avLst/>
           </a:prstGeom>
           <a:blipFill>
-            <a:blip r:embed="rId2"/>
+            <a:blip r:embed="rId1"/>
             <a:tile tx="0" ty="0" sx="100000" sy="100000" flip="none" algn="tl"/>
           </a:blipFill>
           <a:ln>
@@ -12100,11 +12076,6 @@
         </p:style>
       </p:cxnSp>
     </p:spTree>
-    <p:extLst>
-      <p:ext uri="{BB962C8B-B14F-4D97-AF65-F5344CB8AC3E}">
-        <p14:creationId xmlns:p14="http://schemas.microsoft.com/office/powerpoint/2010/main" val="936605445"/>
-      </p:ext>
-    </p:extLst>
   </p:cSld>
   <p:clrMapOvr>
     <a:masterClrMapping/>
@@ -12171,12 +12142,14 @@
               <a:rPr lang="en-IN" dirty="0"/>
               <a:t>Algorithmic limitations because of mutual dependencies</a:t>
             </a:r>
+            <a:endParaRPr lang="en-IN" dirty="0"/>
           </a:p>
           <a:p>
             <a:r>
               <a:rPr lang="en-IN" dirty="0"/>
               <a:t>Bottlenecks because of shared resources</a:t>
             </a:r>
+            <a:endParaRPr lang="en-IN" dirty="0"/>
           </a:p>
           <a:p>
             <a:r>
@@ -12187,12 +12160,14 @@
               <a:rPr lang="en-IN" dirty="0"/>
               <a:t> Overhead</a:t>
             </a:r>
+            <a:endParaRPr lang="en-IN" dirty="0"/>
           </a:p>
           <a:p>
             <a:r>
               <a:rPr lang="en-IN" dirty="0"/>
               <a:t>Communication</a:t>
             </a:r>
+            <a:endParaRPr lang="en-IN" dirty="0"/>
           </a:p>
           <a:p>
             <a:endParaRPr lang="en-US" dirty="0"/>
@@ -12223,11 +12198,6 @@
         </p:txBody>
       </p:sp>
     </p:spTree>
-    <p:extLst>
-      <p:ext uri="{BB962C8B-B14F-4D97-AF65-F5344CB8AC3E}">
-        <p14:creationId xmlns:p14="http://schemas.microsoft.com/office/powerpoint/2010/main" val="1759281476"/>
-      </p:ext>
-    </p:extLst>
   </p:cSld>
   <p:clrMapOvr>
     <a:masterClrMapping/>
@@ -12275,8 +12245,8 @@
           </a:p>
         </p:txBody>
       </p:sp>
-      <mc:AlternateContent xmlns:mc="http://schemas.openxmlformats.org/markup-compatibility/2006" xmlns:a14="http://schemas.microsoft.com/office/drawing/2010/main">
-        <mc:Choice Requires="a14">
+      <mc:AlternateContent xmlns:mc="http://schemas.openxmlformats.org/markup-compatibility/2006">
+        <mc:Choice xmlns:a14="http://schemas.microsoft.com/office/drawing/2010/main" Requires="a14">
           <p:sp>
             <p:nvSpPr>
               <p:cNvPr id="3" name="Content Placeholder 2"/>
@@ -12290,18 +12260,19 @@
             <p:spPr/>
             <p:txBody>
               <a:bodyPr>
-                <a:normAutofit fontScale="92500" lnSpcReduction="10000"/>
+                <a:noAutofit/>
               </a:bodyPr>
               <a:lstStyle/>
               <a:p>
                 <a:r>
-                  <a:rPr lang="en-IN" dirty="0"/>
+                  <a:rPr lang="en-IN" sz="3200" dirty="0"/>
                   <a:t>For fixed problem to be solved by N workers,</a:t>
                 </a:r>
+                <a:endParaRPr lang="en-IN" sz="3200" dirty="0"/>
               </a:p>
               <a:p>
                 <a:r>
-                  <a:rPr lang="en-IN" dirty="0"/>
+                  <a:rPr lang="en-IN" sz="3200" dirty="0"/>
                   <a:t>The single worker run time, </a:t>
                 </a:r>
                 <a14:m>
@@ -12309,14 +12280,14 @@
                     <m:sSub>
                       <m:sSubPr>
                         <m:ctrlPr>
-                          <a:rPr lang="en-IN" i="1">
+                          <a:rPr lang="en-IN" sz="3200" i="1">
                             <a:latin typeface="Cambria Math" panose="02040503050406030204" pitchFamily="18" charset="0"/>
                           </a:rPr>
                         </m:ctrlPr>
                       </m:sSubPr>
                       <m:e>
                         <m:r>
-                          <a:rPr lang="en-IN" i="1">
+                          <a:rPr lang="en-IN" sz="3200" i="1">
                             <a:latin typeface="Cambria Math"/>
                           </a:rPr>
                           <m:t>𝑇</m:t>
@@ -12324,7 +12295,7 @@
                       </m:e>
                       <m:sub>
                         <m:r>
-                          <a:rPr lang="en-IN" i="1">
+                          <a:rPr lang="en-IN" sz="3200" i="1">
                             <a:latin typeface="Cambria Math"/>
                           </a:rPr>
                           <m:t>𝑠</m:t>
@@ -12332,36 +12303,36 @@
                       </m:sub>
                     </m:sSub>
                     <m:r>
-                      <a:rPr lang="en-IN" i="1">
+                      <a:rPr lang="en-IN" sz="3200" i="1">
                         <a:latin typeface="Cambria Math"/>
                       </a:rPr>
                       <m:t>=</m:t>
                     </m:r>
                     <m:r>
-                      <a:rPr lang="en-IN" i="1">
+                      <a:rPr lang="en-IN" sz="3200" i="1">
                         <a:latin typeface="Cambria Math"/>
                       </a:rPr>
                       <m:t>𝑆</m:t>
                     </m:r>
                     <m:r>
-                      <a:rPr lang="en-IN" i="1">
+                      <a:rPr lang="en-IN" sz="3200" i="1">
                         <a:latin typeface="Cambria Math"/>
                       </a:rPr>
                       <m:t>+</m:t>
                     </m:r>
                     <m:r>
-                      <a:rPr lang="en-IN" i="1">
+                      <a:rPr lang="en-IN" sz="3200" i="1">
                         <a:latin typeface="Cambria Math"/>
                       </a:rPr>
                       <m:t>𝑃</m:t>
                     </m:r>
                   </m:oMath>
                 </a14:m>
-                <a:endParaRPr lang="en-IN" dirty="0"/>
+                <a:endParaRPr lang="en-IN" sz="3200" dirty="0"/>
               </a:p>
               <a:p>
                 <a:r>
-                  <a:rPr lang="en-IN" dirty="0"/>
+                  <a:rPr lang="en-IN" sz="3200" dirty="0"/>
                   <a:t>The N-workers run time, </a:t>
                 </a:r>
                 <a14:m>
@@ -12369,14 +12340,14 @@
                     <m:sSub>
                       <m:sSubPr>
                         <m:ctrlPr>
-                          <a:rPr lang="en-IN" i="1">
+                          <a:rPr lang="en-IN" sz="3200" i="1">
                             <a:latin typeface="Cambria Math" panose="02040503050406030204" pitchFamily="18" charset="0"/>
                           </a:rPr>
                         </m:ctrlPr>
                       </m:sSubPr>
                       <m:e>
                         <m:r>
-                          <a:rPr lang="en-IN" i="1">
+                          <a:rPr lang="en-IN" sz="3200" i="1">
                             <a:latin typeface="Cambria Math"/>
                           </a:rPr>
                           <m:t>𝑇</m:t>
@@ -12384,7 +12355,7 @@
                       </m:e>
                       <m:sub>
                         <m:r>
-                          <a:rPr lang="en-IN" i="1">
+                          <a:rPr lang="en-IN" sz="3200" i="1">
                             <a:latin typeface="Cambria Math"/>
                           </a:rPr>
                           <m:t>𝑝</m:t>
@@ -12392,19 +12363,19 @@
                       </m:sub>
                     </m:sSub>
                     <m:r>
-                      <a:rPr lang="en-IN" i="1">
+                      <a:rPr lang="en-IN" sz="3200" i="1">
                         <a:latin typeface="Cambria Math"/>
                       </a:rPr>
                       <m:t>=</m:t>
                     </m:r>
                     <m:r>
-                      <a:rPr lang="en-IN" i="1">
+                      <a:rPr lang="en-IN" sz="3200" i="1">
                         <a:latin typeface="Cambria Math"/>
                       </a:rPr>
                       <m:t>𝑆</m:t>
                     </m:r>
                     <m:r>
-                      <a:rPr lang="en-IN" i="1">
+                      <a:rPr lang="en-IN" sz="3200" i="1">
                         <a:latin typeface="Cambria Math"/>
                       </a:rPr>
                       <m:t>+</m:t>
@@ -12412,14 +12383,14 @@
                     <m:f>
                       <m:fPr>
                         <m:ctrlPr>
-                          <a:rPr lang="en-IN" i="1">
+                          <a:rPr lang="en-IN" sz="3200" i="1">
                             <a:latin typeface="Cambria Math" panose="02040503050406030204" pitchFamily="18" charset="0"/>
                           </a:rPr>
                         </m:ctrlPr>
                       </m:fPr>
                       <m:num>
                         <m:r>
-                          <a:rPr lang="en-IN" i="1">
+                          <a:rPr lang="en-IN" sz="3200" i="1">
                             <a:latin typeface="Cambria Math"/>
                           </a:rPr>
                           <m:t>𝑃</m:t>
@@ -12427,7 +12398,7 @@
                       </m:num>
                       <m:den>
                         <m:r>
-                          <a:rPr lang="en-IN" i="1">
+                          <a:rPr lang="en-IN" sz="3200" i="1">
                             <a:latin typeface="Cambria Math"/>
                           </a:rPr>
                           <m:t>𝑁</m:t>
@@ -12436,42 +12407,43 @@
                     </m:f>
                   </m:oMath>
                 </a14:m>
-                <a:endParaRPr lang="en-IN" dirty="0"/>
+                <a:endParaRPr lang="en-IN" sz="3200" dirty="0"/>
               </a:p>
               <a:p>
                 <a:r>
-                  <a:rPr lang="en-IN" dirty="0"/>
+                  <a:rPr lang="en-IN" sz="3200" dirty="0"/>
                   <a:t>Where </a:t>
                 </a:r>
                 <a:r>
-                  <a:rPr lang="en-IN" i="1" dirty="0"/>
+                  <a:rPr lang="en-IN" sz="3200" i="1" dirty="0"/>
                   <a:t>S</a:t>
                 </a:r>
                 <a:r>
-                  <a:rPr lang="en-IN" dirty="0"/>
+                  <a:rPr lang="en-IN" sz="3200" dirty="0"/>
                   <a:t> is amount of work can be serialized and </a:t>
                 </a:r>
                 <a:r>
-                  <a:rPr lang="en-IN" i="1" dirty="0"/>
+                  <a:rPr lang="en-IN" sz="3200" i="1" dirty="0"/>
                   <a:t>P</a:t>
                 </a:r>
                 <a:r>
-                  <a:rPr lang="en-IN" dirty="0"/>
+                  <a:rPr lang="en-IN" sz="3200" dirty="0"/>
                   <a:t> is amount of work that can be parallelized</a:t>
                 </a:r>
+                <a:endParaRPr lang="en-IN" sz="3200" dirty="0"/>
               </a:p>
               <a:p>
-                <a:endParaRPr lang="en-US" dirty="0"/>
+                <a:endParaRPr lang="en-IN" sz="3200" dirty="0"/>
               </a:p>
             </p:txBody>
           </p:sp>
         </mc:Choice>
-        <mc:Fallback xmlns="">
+        <mc:Fallback>
           <p:sp>
             <p:nvSpPr>
               <p:cNvPr id="3" name="Content Placeholder 2"/>
               <p:cNvSpPr>
-                <a:spLocks noGrp="1" noRot="1" noChangeAspect="1" noMove="1" noResize="1" noEditPoints="1" noAdjustHandles="1" noChangeArrowheads="1" noChangeShapeType="1" noTextEdit="1"/>
+                <a:spLocks noRot="1" noChangeAspect="1" noMove="1" noResize="1" noEditPoints="1" noAdjustHandles="1" noChangeArrowheads="1" noChangeShapeType="1" noTextEdit="1"/>
               </p:cNvSpPr>
               <p:nvPr>
                 <p:ph idx="1"/>
@@ -12479,9 +12451,9 @@
             </p:nvSpPr>
             <p:spPr>
               <a:blipFill rotWithShape="1">
-                <a:blip r:embed="rId2"/>
+                <a:blip r:embed="rId1"/>
                 <a:stretch>
-                  <a:fillRect l="-2074" t="-3235" r="-74"/>
+                  <a:fillRect b="-2154"/>
                 </a:stretch>
               </a:blipFill>
             </p:spPr>
@@ -12490,7 +12462,7 @@
               <a:lstStyle/>
               <a:p>
                 <a:r>
-                  <a:rPr lang="en-US">
+                  <a:rPr lang="en-US" altLang="en-US">
                     <a:noFill/>
                   </a:rPr>
                   <a:t> </a:t>
@@ -12524,11 +12496,6 @@
         </p:txBody>
       </p:sp>
     </p:spTree>
-    <p:extLst>
-      <p:ext uri="{BB962C8B-B14F-4D97-AF65-F5344CB8AC3E}">
-        <p14:creationId xmlns:p14="http://schemas.microsoft.com/office/powerpoint/2010/main" val="3692174450"/>
-      </p:ext>
-    </p:extLst>
   </p:cSld>
   <p:clrMapOvr>
     <a:masterClrMapping/>
@@ -12576,8 +12543,8 @@
           </a:p>
         </p:txBody>
       </p:sp>
-      <mc:AlternateContent xmlns:mc="http://schemas.openxmlformats.org/markup-compatibility/2006" xmlns:a14="http://schemas.microsoft.com/office/drawing/2010/main">
-        <mc:Choice Requires="a14">
+      <mc:AlternateContent xmlns:mc="http://schemas.openxmlformats.org/markup-compatibility/2006">
+        <mc:Choice xmlns:a14="http://schemas.microsoft.com/office/drawing/2010/main" Requires="a14">
           <p:sp>
             <p:nvSpPr>
               <p:cNvPr id="3" name="Content Placeholder 2"/>
@@ -12599,12 +12566,14 @@
                   <a:rPr lang="en-IN" dirty="0"/>
                   <a:t>Application speed up is defined as quotient of parallel and serial performance for fixed problem size</a:t>
                 </a:r>
+                <a:endParaRPr lang="en-IN" dirty="0"/>
               </a:p>
               <a:p>
                 <a:r>
                   <a:rPr lang="en-IN" dirty="0"/>
                   <a:t>Performance can be defined as “work done over time”</a:t>
                 </a:r>
+                <a:endParaRPr lang="en-IN" dirty="0"/>
               </a:p>
               <a:p>
                 <a:r>
@@ -12725,6 +12694,7 @@
                   <a:rPr lang="en-IN" dirty="0"/>
                   <a:t> = 1</a:t>
                 </a:r>
+                <a:endParaRPr lang="en-IN" dirty="0"/>
               </a:p>
               <a:p>
                 <a:r>
@@ -12895,7 +12865,13 @@
                                   <a:rPr lang="en-IN" i="1">
                                     <a:latin typeface="Cambria Math"/>
                                   </a:rPr>
-                                  <m:t>1−</m:t>
+                                  <m:t>1</m:t>
+                                </m:r>
+                                <m:r>
+                                  <a:rPr lang="en-IN" i="1">
+                                    <a:latin typeface="Cambria Math"/>
+                                  </a:rPr>
+                                  <m:t>−</m:t>
                                 </m:r>
                                 <m:r>
                                   <a:rPr lang="en-IN" i="1">
@@ -12931,6 +12907,7 @@
                   <a:rPr lang="en-IN" dirty="0"/>
                   <a:t> </a:t>
                 </a:r>
+                <a:endParaRPr lang="en-IN" dirty="0"/>
               </a:p>
               <a:p>
                 <a:endParaRPr lang="en-US" dirty="0"/>
@@ -12938,12 +12915,12 @@
             </p:txBody>
           </p:sp>
         </mc:Choice>
-        <mc:Fallback xmlns="">
+        <mc:Fallback>
           <p:sp>
             <p:nvSpPr>
               <p:cNvPr id="3" name="Content Placeholder 2"/>
               <p:cNvSpPr>
-                <a:spLocks noGrp="1" noRot="1" noChangeAspect="1" noMove="1" noResize="1" noEditPoints="1" noAdjustHandles="1" noChangeArrowheads="1" noChangeShapeType="1" noTextEdit="1"/>
+                <a:spLocks noRot="1" noChangeAspect="1" noMove="1" noResize="1" noEditPoints="1" noAdjustHandles="1" noChangeArrowheads="1" noChangeShapeType="1" noTextEdit="1"/>
               </p:cNvSpPr>
               <p:nvPr>
                 <p:ph idx="1"/>
@@ -12951,9 +12928,9 @@
             </p:nvSpPr>
             <p:spPr>
               <a:blipFill rotWithShape="1">
-                <a:blip r:embed="rId2"/>
+                <a:blip r:embed="rId1"/>
                 <a:stretch>
-                  <a:fillRect l="-1778" t="-3908" r="-1407"/>
+                  <a:fillRect t="-687" b="-10712"/>
                 </a:stretch>
               </a:blipFill>
             </p:spPr>
@@ -12962,7 +12939,7 @@
               <a:lstStyle/>
               <a:p>
                 <a:r>
-                  <a:rPr lang="en-US">
+                  <a:rPr lang="en-US" altLang="en-US">
                     <a:noFill/>
                   </a:rPr>
                   <a:t> </a:t>
@@ -12996,11 +12973,6 @@
         </p:txBody>
       </p:sp>
     </p:spTree>
-    <p:extLst>
-      <p:ext uri="{BB962C8B-B14F-4D97-AF65-F5344CB8AC3E}">
-        <p14:creationId xmlns:p14="http://schemas.microsoft.com/office/powerpoint/2010/main" val="3399010591"/>
-      </p:ext>
-    </p:extLst>
   </p:cSld>
   <p:clrMapOvr>
     <a:masterClrMapping/>
@@ -13048,8 +13020,8 @@
           </a:p>
         </p:txBody>
       </p:sp>
-      <mc:AlternateContent xmlns:mc="http://schemas.openxmlformats.org/markup-compatibility/2006" xmlns:a14="http://schemas.microsoft.com/office/drawing/2010/main">
-        <mc:Choice Requires="a14">
+      <mc:AlternateContent xmlns:mc="http://schemas.openxmlformats.org/markup-compatibility/2006">
+        <mc:Choice xmlns:a14="http://schemas.microsoft.com/office/drawing/2010/main" Requires="a14">
           <p:sp>
             <p:nvSpPr>
               <p:cNvPr id="3" name="Content Placeholder 2"/>
@@ -13071,6 +13043,7 @@
                   <a:rPr lang="en-IN" dirty="0"/>
                   <a:t>Gene Amdahl, application speed up is limited to 1/s when N tends to infinite</a:t>
                 </a:r>
+                <a:endParaRPr lang="en-IN" dirty="0"/>
               </a:p>
               <a:p>
                 <a:r>
@@ -13085,6 +13058,7 @@
                   <a:rPr lang="en-IN" dirty="0"/>
                   <a:t>CPUs?”</a:t>
                 </a:r>
+                <a:endParaRPr lang="en-IN" dirty="0"/>
               </a:p>
               <a:p>
                 <a:r>
@@ -13331,7 +13305,13 @@
                               <a:rPr lang="en-IN" i="1">
                                 <a:latin typeface="Cambria Math"/>
                               </a:rPr>
-                              <m:t>1−</m:t>
+                              <m:t>1</m:t>
+                            </m:r>
+                            <m:r>
+                              <a:rPr lang="en-IN" i="1">
+                                <a:latin typeface="Cambria Math"/>
+                              </a:rPr>
+                              <m:t>−</m:t>
                             </m:r>
                             <m:r>
                               <a:rPr lang="en-IN" i="1">
@@ -13366,7 +13346,13 @@
                                   <a:rPr lang="en-IN" i="1">
                                     <a:latin typeface="Cambria Math"/>
                                   </a:rPr>
-                                  <m:t>1−</m:t>
+                                  <m:t>1</m:t>
+                                </m:r>
+                                <m:r>
+                                  <a:rPr lang="en-IN" i="1">
+                                    <a:latin typeface="Cambria Math"/>
+                                  </a:rPr>
+                                  <m:t>−</m:t>
                                 </m:r>
                                 <m:r>
                                   <a:rPr lang="en-IN" i="1">
@@ -13402,6 +13388,7 @@
                   <a:rPr lang="en-IN" dirty="0"/>
                   <a:t> </a:t>
                 </a:r>
+                <a:endParaRPr lang="en-IN" dirty="0"/>
               </a:p>
               <a:p>
                 <a:r>
@@ -13521,7 +13508,13 @@
                               <a:rPr lang="en-IN" i="1">
                                 <a:latin typeface="Cambria Math"/>
                               </a:rPr>
-                              <m:t>1−</m:t>
+                              <m:t>1</m:t>
+                            </m:r>
+                            <m:r>
+                              <a:rPr lang="en-IN" i="1">
+                                <a:latin typeface="Cambria Math"/>
+                              </a:rPr>
+                              <m:t>−</m:t>
                             </m:r>
                             <m:r>
                               <a:rPr lang="en-IN" i="1">
@@ -13551,12 +13544,12 @@
             </p:txBody>
           </p:sp>
         </mc:Choice>
-        <mc:Fallback xmlns="">
+        <mc:Fallback>
           <p:sp>
             <p:nvSpPr>
               <p:cNvPr id="3" name="Content Placeholder 2"/>
               <p:cNvSpPr>
-                <a:spLocks noGrp="1" noRot="1" noChangeAspect="1" noMove="1" noResize="1" noEditPoints="1" noAdjustHandles="1" noChangeArrowheads="1" noChangeShapeType="1" noTextEdit="1"/>
+                <a:spLocks noRot="1" noChangeAspect="1" noMove="1" noResize="1" noEditPoints="1" noAdjustHandles="1" noChangeArrowheads="1" noChangeShapeType="1" noTextEdit="1"/>
               </p:cNvSpPr>
               <p:nvPr>
                 <p:ph idx="1"/>
@@ -13564,9 +13557,9 @@
             </p:nvSpPr>
             <p:spPr>
               <a:blipFill rotWithShape="1">
-                <a:blip r:embed="rId2"/>
+                <a:blip r:embed="rId1"/>
                 <a:stretch>
-                  <a:fillRect l="-1259" t="-2965"/>
+                  <a:fillRect t="-393" b="-3627"/>
                 </a:stretch>
               </a:blipFill>
             </p:spPr>
@@ -13575,7 +13568,7 @@
               <a:lstStyle/>
               <a:p>
                 <a:r>
-                  <a:rPr lang="en-US">
+                  <a:rPr lang="en-US" altLang="en-US">
                     <a:noFill/>
                   </a:rPr>
                   <a:t> </a:t>
@@ -13609,11 +13602,6 @@
         </p:txBody>
       </p:sp>
     </p:spTree>
-    <p:extLst>
-      <p:ext uri="{BB962C8B-B14F-4D97-AF65-F5344CB8AC3E}">
-        <p14:creationId xmlns:p14="http://schemas.microsoft.com/office/powerpoint/2010/main" val="2404951240"/>
-      </p:ext>
-    </p:extLst>
   </p:cSld>
   <p:clrMapOvr>
     <a:masterClrMapping/>
@@ -13657,6 +13645,7 @@
               <a:rPr lang="en-US" dirty="0"/>
               <a:t>Problems </a:t>
             </a:r>
+            <a:endParaRPr lang="en-US" dirty="0"/>
           </a:p>
         </p:txBody>
       </p:sp>
@@ -13681,12 +13670,14 @@
               <a:rPr lang="en-IN" dirty="0"/>
               <a:t>Bob is given the job to write a program that will get a speedup of 3.8 on 4 processors. </a:t>
             </a:r>
+            <a:endParaRPr lang="en-IN" dirty="0"/>
           </a:p>
           <a:p>
             <a:r>
               <a:rPr lang="en-IN" dirty="0"/>
               <a:t>He makes it 95% parallel, and goes home dreaming of a big pay raise. </a:t>
             </a:r>
+            <a:endParaRPr lang="en-IN" dirty="0"/>
           </a:p>
           <a:p>
             <a:r>
@@ -13721,11 +13712,6 @@
         </p:txBody>
       </p:sp>
     </p:spTree>
-    <p:extLst>
-      <p:ext uri="{BB962C8B-B14F-4D97-AF65-F5344CB8AC3E}">
-        <p14:creationId xmlns:p14="http://schemas.microsoft.com/office/powerpoint/2010/main" val="915183531"/>
-      </p:ext>
-    </p:extLst>
   </p:cSld>
   <p:clrMapOvr>
     <a:masterClrMapping/>
@@ -13773,8 +13759,8 @@
           </a:p>
         </p:txBody>
       </p:sp>
-      <mc:AlternateContent xmlns:mc="http://schemas.openxmlformats.org/markup-compatibility/2006" xmlns:a14="http://schemas.microsoft.com/office/drawing/2010/main">
-        <mc:Choice Requires="a14">
+      <mc:AlternateContent xmlns:mc="http://schemas.openxmlformats.org/markup-compatibility/2006">
+        <mc:Choice xmlns:a14="http://schemas.microsoft.com/office/drawing/2010/main" Requires="a14">
           <p:sp>
             <p:nvSpPr>
               <p:cNvPr id="3" name="Content Placeholder 2"/>
@@ -13816,6 +13802,7 @@
                   <a:rPr lang="en-IN" dirty="0"/>
                   <a:t>CPUs?”</a:t>
                 </a:r>
+                <a:endParaRPr lang="en-IN" dirty="0"/>
               </a:p>
               <a:p>
                 <a14:m>
@@ -13866,7 +13853,19 @@
                       <a:rPr lang="en-IN" i="1">
                         <a:latin typeface="Cambria Math"/>
                       </a:rPr>
-                      <m:t>−1)</m:t>
+                      <m:t>−</m:t>
+                    </m:r>
+                    <m:r>
+                      <a:rPr lang="en-IN" i="1">
+                        <a:latin typeface="Cambria Math"/>
+                      </a:rPr>
+                      <m:t>1</m:t>
+                    </m:r>
+                    <m:r>
+                      <a:rPr lang="en-IN" i="1">
+                        <a:latin typeface="Cambria Math"/>
+                      </a:rPr>
+                      <m:t>)</m:t>
                     </m:r>
                   </m:oMath>
                 </a14:m>
@@ -14078,12 +14077,12 @@
             </p:txBody>
           </p:sp>
         </mc:Choice>
-        <mc:Fallback xmlns="">
+        <mc:Fallback>
           <p:sp>
             <p:nvSpPr>
               <p:cNvPr id="3" name="Content Placeholder 2"/>
               <p:cNvSpPr>
-                <a:spLocks noGrp="1" noRot="1" noChangeAspect="1" noMove="1" noResize="1" noEditPoints="1" noAdjustHandles="1" noChangeArrowheads="1" noChangeShapeType="1" noTextEdit="1"/>
+                <a:spLocks noRot="1" noChangeAspect="1" noMove="1" noResize="1" noEditPoints="1" noAdjustHandles="1" noChangeArrowheads="1" noChangeShapeType="1" noTextEdit="1"/>
               </p:cNvSpPr>
               <p:nvPr>
                 <p:ph idx="1"/>
@@ -14091,9 +14090,9 @@
             </p:nvSpPr>
             <p:spPr>
               <a:blipFill rotWithShape="1">
-                <a:blip r:embed="rId2"/>
+                <a:blip r:embed="rId1"/>
                 <a:stretch>
-                  <a:fillRect l="-1556" t="-3504" r="-963"/>
+                  <a:fillRect t="-547" r="-24884" b="7"/>
                 </a:stretch>
               </a:blipFill>
             </p:spPr>
@@ -14102,7 +14101,7 @@
               <a:lstStyle/>
               <a:p>
                 <a:r>
-                  <a:rPr lang="en-US">
+                  <a:rPr lang="en-US" altLang="en-US">
                     <a:noFill/>
                   </a:rPr>
                   <a:t> </a:t>
@@ -14136,11 +14135,6 @@
         </p:txBody>
       </p:sp>
     </p:spTree>
-    <p:extLst>
-      <p:ext uri="{BB962C8B-B14F-4D97-AF65-F5344CB8AC3E}">
-        <p14:creationId xmlns:p14="http://schemas.microsoft.com/office/powerpoint/2010/main" val="3939131439"/>
-      </p:ext>
-    </p:extLst>
   </p:cSld>
   <p:clrMapOvr>
     <a:masterClrMapping/>
@@ -14188,8 +14182,8 @@
           </a:p>
         </p:txBody>
       </p:sp>
-      <mc:AlternateContent xmlns:mc="http://schemas.openxmlformats.org/markup-compatibility/2006" xmlns:a14="http://schemas.microsoft.com/office/drawing/2010/main">
-        <mc:Choice Requires="a14">
+      <mc:AlternateContent xmlns:mc="http://schemas.openxmlformats.org/markup-compatibility/2006">
+        <mc:Choice xmlns:a14="http://schemas.microsoft.com/office/drawing/2010/main" Requires="a14">
           <p:sp>
             <p:nvSpPr>
               <p:cNvPr id="3" name="Content Placeholder 2"/>
@@ -14393,12 +14387,12 @@
             </p:txBody>
           </p:sp>
         </mc:Choice>
-        <mc:Fallback xmlns="">
+        <mc:Fallback>
           <p:sp>
             <p:nvSpPr>
               <p:cNvPr id="3" name="Content Placeholder 2"/>
               <p:cNvSpPr>
-                <a:spLocks noGrp="1" noRot="1" noChangeAspect="1" noMove="1" noResize="1" noEditPoints="1" noAdjustHandles="1" noChangeArrowheads="1" noChangeShapeType="1" noTextEdit="1"/>
+                <a:spLocks noRot="1" noChangeAspect="1" noMove="1" noResize="1" noEditPoints="1" noAdjustHandles="1" noChangeArrowheads="1" noChangeShapeType="1" noTextEdit="1"/>
               </p:cNvSpPr>
               <p:nvPr>
                 <p:ph idx="1"/>
@@ -14406,9 +14400,9 @@
             </p:nvSpPr>
             <p:spPr>
               <a:blipFill rotWithShape="1">
-                <a:blip r:embed="rId2"/>
+                <a:blip r:embed="rId1"/>
                 <a:stretch>
-                  <a:fillRect/>
+                  <a:fillRect b="7"/>
                 </a:stretch>
               </a:blipFill>
             </p:spPr>
@@ -14417,7 +14411,7 @@
               <a:lstStyle/>
               <a:p>
                 <a:r>
-                  <a:rPr lang="en-US">
+                  <a:rPr lang="en-US" altLang="en-US">
                     <a:noFill/>
                   </a:rPr>
                   <a:t> </a:t>
@@ -14451,11 +14445,6 @@
         </p:txBody>
       </p:sp>
     </p:spTree>
-    <p:extLst>
-      <p:ext uri="{BB962C8B-B14F-4D97-AF65-F5344CB8AC3E}">
-        <p14:creationId xmlns:p14="http://schemas.microsoft.com/office/powerpoint/2010/main" val="1006687590"/>
-      </p:ext>
-    </p:extLst>
   </p:cSld>
   <p:clrMapOvr>
     <a:masterClrMapping/>
@@ -14524,36 +14513,42 @@
               <a:rPr lang="en-IN" dirty="0"/>
               <a:t>Cores on a die can have separate caches or shared caches at certain levels</a:t>
             </a:r>
+            <a:endParaRPr lang="en-IN" dirty="0"/>
           </a:p>
           <a:p>
             <a:r>
               <a:rPr lang="en-IN" dirty="0"/>
               <a:t>Sharing cache will reduce latency and improve bandwidth for communication between core</a:t>
             </a:r>
+            <a:endParaRPr lang="en-IN" dirty="0"/>
           </a:p>
           <a:p>
             <a:r>
               <a:rPr lang="en-IN" dirty="0"/>
               <a:t>But it may lead to cache bandwidth bottlenecks</a:t>
             </a:r>
+            <a:endParaRPr lang="en-IN" dirty="0"/>
           </a:p>
           <a:p>
             <a:r>
               <a:rPr lang="en-IN" dirty="0"/>
               <a:t>Recent multicore designs have integrated memory controller which is connected directly to memory modules without chipset</a:t>
             </a:r>
+            <a:endParaRPr lang="en-IN" dirty="0"/>
           </a:p>
           <a:p>
             <a:r>
               <a:rPr lang="en-IN" dirty="0"/>
               <a:t>This reduce main memory latency and allows addition of Hyper Transport or Quick Path inter-socket networks</a:t>
             </a:r>
+            <a:endParaRPr lang="en-IN" dirty="0"/>
           </a:p>
           <a:p>
             <a:r>
               <a:rPr lang="en-IN" dirty="0"/>
               <a:t>Efficient cache coherence communication</a:t>
             </a:r>
+            <a:endParaRPr lang="en-IN" dirty="0"/>
           </a:p>
           <a:p>
             <a:endParaRPr lang="en-US" dirty="0"/>
@@ -14584,11 +14579,6 @@
         </p:txBody>
       </p:sp>
     </p:spTree>
-    <p:extLst>
-      <p:ext uri="{BB962C8B-B14F-4D97-AF65-F5344CB8AC3E}">
-        <p14:creationId xmlns:p14="http://schemas.microsoft.com/office/powerpoint/2010/main" val="2312856552"/>
-      </p:ext>
-    </p:extLst>
   </p:cSld>
   <p:clrMapOvr>
     <a:masterClrMapping/>
@@ -14807,6 +14797,7 @@
                 <a:rPr lang="en-IN" sz="4400" b="1" dirty="0"/>
                 <a:t>P</a:t>
               </a:r>
+              <a:endParaRPr lang="en-IN" sz="4400" b="1" dirty="0"/>
             </a:p>
           </p:txBody>
         </p:sp>
@@ -14848,6 +14839,7 @@
                 <a:rPr lang="en-IN" b="1" dirty="0"/>
                 <a:t>L1D</a:t>
               </a:r>
+              <a:endParaRPr lang="en-IN" b="1" dirty="0"/>
             </a:p>
           </p:txBody>
         </p:sp>
@@ -14889,6 +14881,7 @@
                 <a:rPr lang="en-IN" b="1" dirty="0"/>
                 <a:t>L2</a:t>
               </a:r>
+              <a:endParaRPr lang="en-IN" b="1" dirty="0"/>
             </a:p>
           </p:txBody>
         </p:sp>
@@ -14930,6 +14923,7 @@
                 <a:rPr lang="en-IN" b="1" dirty="0"/>
                 <a:t>L3</a:t>
               </a:r>
+              <a:endParaRPr lang="en-IN" b="1" dirty="0"/>
             </a:p>
           </p:txBody>
         </p:sp>
@@ -14986,6 +14980,7 @@
                 <a:rPr lang="en-IN" sz="4400" b="1" dirty="0"/>
                 <a:t>P</a:t>
               </a:r>
+              <a:endParaRPr lang="en-IN" sz="4400" b="1" dirty="0"/>
             </a:p>
           </p:txBody>
         </p:sp>
@@ -15027,6 +15022,7 @@
                 <a:rPr lang="en-IN" b="1" dirty="0"/>
                 <a:t>L1D</a:t>
               </a:r>
+              <a:endParaRPr lang="en-IN" b="1" dirty="0"/>
             </a:p>
           </p:txBody>
         </p:sp>
@@ -15068,6 +15064,7 @@
                 <a:rPr lang="en-IN" b="1" dirty="0"/>
                 <a:t>L2</a:t>
               </a:r>
+              <a:endParaRPr lang="en-IN" b="1" dirty="0"/>
             </a:p>
           </p:txBody>
         </p:sp>
@@ -15109,6 +15106,7 @@
                 <a:rPr lang="en-IN" b="1" dirty="0"/>
                 <a:t>L3</a:t>
               </a:r>
+              <a:endParaRPr lang="en-IN" b="1" dirty="0"/>
             </a:p>
           </p:txBody>
         </p:sp>
@@ -15189,11 +15187,6 @@
         </p:style>
       </p:cxnSp>
     </p:spTree>
-    <p:extLst>
-      <p:ext uri="{BB962C8B-B14F-4D97-AF65-F5344CB8AC3E}">
-        <p14:creationId xmlns:p14="http://schemas.microsoft.com/office/powerpoint/2010/main" val="4182033541"/>
-      </p:ext>
-    </p:extLst>
   </p:cSld>
   <p:clrMapOvr>
     <a:masterClrMapping/>
@@ -15237,6 +15230,7 @@
               <a:rPr lang="en-US" dirty="0"/>
               <a:t>Motivation </a:t>
             </a:r>
+            <a:endParaRPr lang="en-US" dirty="0"/>
           </a:p>
         </p:txBody>
       </p:sp>
@@ -15259,24 +15253,28 @@
               <a:rPr lang="en-IN" dirty="0"/>
               <a:t>To address computationally intensive problems and increase their response time</a:t>
             </a:r>
+            <a:endParaRPr lang="en-IN" dirty="0"/>
           </a:p>
           <a:p>
             <a:r>
               <a:rPr lang="en-IN" dirty="0"/>
               <a:t>Weather Forecasting</a:t>
             </a:r>
+            <a:endParaRPr lang="en-IN" dirty="0"/>
           </a:p>
           <a:p>
             <a:r>
               <a:rPr lang="en-IN" dirty="0"/>
               <a:t>Genome Sequencing</a:t>
             </a:r>
+            <a:endParaRPr lang="en-IN" dirty="0"/>
           </a:p>
           <a:p>
             <a:r>
               <a:rPr lang="en-IN" dirty="0"/>
               <a:t>Crash Simulation Testing</a:t>
             </a:r>
+            <a:endParaRPr lang="en-IN" dirty="0"/>
           </a:p>
           <a:p>
             <a:endParaRPr lang="en-US" dirty="0"/>
@@ -15307,11 +15305,6 @@
         </p:txBody>
       </p:sp>
     </p:spTree>
-    <p:extLst>
-      <p:ext uri="{BB962C8B-B14F-4D97-AF65-F5344CB8AC3E}">
-        <p14:creationId xmlns:p14="http://schemas.microsoft.com/office/powerpoint/2010/main" val="755312819"/>
-      </p:ext>
-    </p:extLst>
   </p:cSld>
   <p:clrMapOvr>
     <a:masterClrMapping/>
@@ -15393,6 +15386,7 @@
               <a:rPr lang="en-IN" dirty="0"/>
               <a:t>)</a:t>
             </a:r>
+            <a:endParaRPr lang="en-IN" dirty="0"/>
           </a:p>
           <a:p>
             <a:endParaRPr lang="en-US" dirty="0"/>
@@ -15555,6 +15549,7 @@
                     <a:rPr lang="en-IN" sz="4400" b="1" dirty="0"/>
                     <a:t>P</a:t>
                   </a:r>
+                  <a:endParaRPr lang="en-IN" sz="4400" b="1" dirty="0"/>
                 </a:p>
               </p:txBody>
             </p:sp>
@@ -15596,6 +15591,7 @@
                     <a:rPr lang="en-IN" b="1" dirty="0"/>
                     <a:t>L1D</a:t>
                   </a:r>
+                  <a:endParaRPr lang="en-IN" b="1" dirty="0"/>
                 </a:p>
               </p:txBody>
             </p:sp>
@@ -15666,6 +15662,7 @@
                       <a:rPr lang="en-IN" sz="4400" b="1" dirty="0"/>
                       <a:t>P</a:t>
                     </a:r>
+                    <a:endParaRPr lang="en-IN" sz="4400" b="1" dirty="0"/>
                   </a:p>
                 </p:txBody>
               </p:sp>
@@ -15707,6 +15704,7 @@
                       <a:rPr lang="en-IN" b="1" dirty="0"/>
                       <a:t>L1D</a:t>
                     </a:r>
+                    <a:endParaRPr lang="en-IN" b="1" dirty="0"/>
                   </a:p>
                 </p:txBody>
               </p:sp>
@@ -15748,6 +15746,7 @@
                       <a:rPr lang="en-IN" b="1" dirty="0"/>
                       <a:t>L2</a:t>
                     </a:r>
+                    <a:endParaRPr lang="en-IN" b="1" dirty="0"/>
                   </a:p>
                 </p:txBody>
               </p:sp>
@@ -15804,6 +15803,7 @@
                       <a:rPr lang="en-IN" sz="4400" b="1" dirty="0"/>
                       <a:t>P</a:t>
                     </a:r>
+                    <a:endParaRPr lang="en-IN" sz="4400" b="1" dirty="0"/>
                   </a:p>
                 </p:txBody>
               </p:sp>
@@ -15845,6 +15845,7 @@
                       <a:rPr lang="en-IN" b="1" dirty="0"/>
                       <a:t>L1D</a:t>
                     </a:r>
+                    <a:endParaRPr lang="en-IN" b="1" dirty="0"/>
                   </a:p>
                 </p:txBody>
               </p:sp>
@@ -15901,6 +15902,7 @@
                       <a:rPr lang="en-IN" sz="4400" b="1" dirty="0"/>
                       <a:t>P</a:t>
                     </a:r>
+                    <a:endParaRPr lang="en-IN" sz="4400" b="1" dirty="0"/>
                   </a:p>
                 </p:txBody>
               </p:sp>
@@ -15942,6 +15944,7 @@
                       <a:rPr lang="en-IN" b="1" dirty="0"/>
                       <a:t>L1D</a:t>
                     </a:r>
+                    <a:endParaRPr lang="en-IN" b="1" dirty="0"/>
                   </a:p>
                 </p:txBody>
               </p:sp>
@@ -15983,6 +15986,7 @@
                       <a:rPr lang="en-IN" b="1" dirty="0"/>
                       <a:t>L2</a:t>
                     </a:r>
+                    <a:endParaRPr lang="en-IN" b="1" dirty="0"/>
                   </a:p>
                 </p:txBody>
               </p:sp>
@@ -16100,11 +16104,6 @@
         </p:grpSp>
       </p:grpSp>
     </p:spTree>
-    <p:extLst>
-      <p:ext uri="{BB962C8B-B14F-4D97-AF65-F5344CB8AC3E}">
-        <p14:creationId xmlns:p14="http://schemas.microsoft.com/office/powerpoint/2010/main" val="597158649"/>
-      </p:ext>
-    </p:extLst>
   </p:cSld>
   <p:clrMapOvr>
     <a:masterClrMapping/>
@@ -16182,12 +16181,14 @@
               <a:rPr lang="en-IN" dirty="0"/>
               <a:t>Shared L2, separate L3</a:t>
             </a:r>
+            <a:endParaRPr lang="en-IN" dirty="0"/>
           </a:p>
           <a:p>
             <a:r>
               <a:rPr lang="en-IN" dirty="0"/>
               <a:t>L2 groups are dual cores and L3 group is whole chip</a:t>
             </a:r>
+            <a:endParaRPr lang="en-IN" dirty="0"/>
           </a:p>
           <a:p>
             <a:r>
@@ -16361,6 +16362,7 @@
                     <a:rPr lang="en-IN" sz="4400" b="1" dirty="0"/>
                     <a:t>P</a:t>
                   </a:r>
+                  <a:endParaRPr lang="en-IN" sz="4400" b="1" dirty="0"/>
                 </a:p>
               </p:txBody>
             </p:sp>
@@ -16402,6 +16404,7 @@
                     <a:rPr lang="en-IN" b="1" dirty="0"/>
                     <a:t>L1D</a:t>
                   </a:r>
+                  <a:endParaRPr lang="en-IN" b="1" dirty="0"/>
                 </a:p>
               </p:txBody>
             </p:sp>
@@ -16458,6 +16461,7 @@
                     <a:rPr lang="en-IN" sz="4400" b="1" dirty="0"/>
                     <a:t>P</a:t>
                   </a:r>
+                  <a:endParaRPr lang="en-IN" sz="4400" b="1" dirty="0"/>
                 </a:p>
               </p:txBody>
             </p:sp>
@@ -16499,6 +16503,7 @@
                     <a:rPr lang="en-IN" b="1" dirty="0"/>
                     <a:t>L1D</a:t>
                   </a:r>
+                  <a:endParaRPr lang="en-IN" b="1" dirty="0"/>
                 </a:p>
               </p:txBody>
             </p:sp>
@@ -16569,6 +16574,7 @@
                       <a:rPr lang="en-IN" sz="4400" b="1" dirty="0"/>
                       <a:t>P</a:t>
                     </a:r>
+                    <a:endParaRPr lang="en-IN" sz="4400" b="1" dirty="0"/>
                   </a:p>
                 </p:txBody>
               </p:sp>
@@ -16610,6 +16616,7 @@
                       <a:rPr lang="en-IN" b="1" dirty="0"/>
                       <a:t>L1D</a:t>
                     </a:r>
+                    <a:endParaRPr lang="en-IN" b="1" dirty="0"/>
                   </a:p>
                 </p:txBody>
               </p:sp>
@@ -16651,6 +16658,7 @@
                       <a:rPr lang="en-IN" b="1" dirty="0"/>
                       <a:t>L3</a:t>
                     </a:r>
+                    <a:endParaRPr lang="en-IN" b="1" dirty="0"/>
                   </a:p>
                 </p:txBody>
               </p:sp>
@@ -16707,6 +16715,7 @@
                       <a:rPr lang="en-IN" sz="4400" b="1" dirty="0"/>
                       <a:t>P</a:t>
                     </a:r>
+                    <a:endParaRPr lang="en-IN" sz="4400" b="1" dirty="0"/>
                   </a:p>
                 </p:txBody>
               </p:sp>
@@ -16748,6 +16757,7 @@
                       <a:rPr lang="en-IN" b="1" dirty="0"/>
                       <a:t>L1D</a:t>
                     </a:r>
+                    <a:endParaRPr lang="en-IN" b="1" dirty="0"/>
                   </a:p>
                 </p:txBody>
               </p:sp>
@@ -16789,6 +16799,7 @@
                       <a:rPr lang="en-IN" b="1" dirty="0"/>
                       <a:t>L2</a:t>
                     </a:r>
+                    <a:endParaRPr lang="en-IN" b="1" dirty="0"/>
                   </a:p>
                 </p:txBody>
               </p:sp>
@@ -16845,6 +16856,7 @@
                       <a:rPr lang="en-IN" sz="4400" b="1" dirty="0"/>
                       <a:t>P</a:t>
                     </a:r>
+                    <a:endParaRPr lang="en-IN" sz="4400" b="1" dirty="0"/>
                   </a:p>
                 </p:txBody>
               </p:sp>
@@ -16886,6 +16898,7 @@
                       <a:rPr lang="en-IN" b="1" dirty="0"/>
                       <a:t>L1D</a:t>
                     </a:r>
+                    <a:endParaRPr lang="en-IN" b="1" dirty="0"/>
                   </a:p>
                 </p:txBody>
               </p:sp>
@@ -16927,6 +16940,7 @@
                       <a:rPr lang="en-IN" b="1" dirty="0"/>
                       <a:t>L2</a:t>
                     </a:r>
+                    <a:endParaRPr lang="en-IN" b="1" dirty="0"/>
                   </a:p>
                 </p:txBody>
               </p:sp>
@@ -16983,6 +16997,7 @@
                       <a:rPr lang="en-IN" sz="4400" b="1" dirty="0"/>
                       <a:t>P</a:t>
                     </a:r>
+                    <a:endParaRPr lang="en-IN" sz="4400" b="1" dirty="0"/>
                   </a:p>
                 </p:txBody>
               </p:sp>
@@ -17024,6 +17039,7 @@
                       <a:rPr lang="en-IN" b="1" dirty="0"/>
                       <a:t>L1D</a:t>
                     </a:r>
+                    <a:endParaRPr lang="en-IN" b="1" dirty="0"/>
                   </a:p>
                 </p:txBody>
               </p:sp>
@@ -17065,6 +17081,7 @@
                       <a:rPr lang="en-IN" b="1" dirty="0"/>
                       <a:t>L2</a:t>
                     </a:r>
+                    <a:endParaRPr lang="en-IN" b="1" dirty="0"/>
                   </a:p>
                 </p:txBody>
               </p:sp>
@@ -17108,11 +17125,6 @@
         </p:cxnSp>
       </p:grpSp>
     </p:spTree>
-    <p:extLst>
-      <p:ext uri="{BB962C8B-B14F-4D97-AF65-F5344CB8AC3E}">
-        <p14:creationId xmlns:p14="http://schemas.microsoft.com/office/powerpoint/2010/main" val="4204380672"/>
-      </p:ext>
-    </p:extLst>
   </p:cSld>
   <p:clrMapOvr>
     <a:masterClrMapping/>
@@ -17186,24 +17198,28 @@
               <a:rPr lang="en-IN" dirty="0"/>
               <a:t>Separate L1 and L2 caches</a:t>
             </a:r>
+            <a:endParaRPr lang="en-IN" dirty="0"/>
           </a:p>
           <a:p>
             <a:r>
               <a:rPr lang="en-IN" dirty="0"/>
               <a:t>Shared L3 cache</a:t>
             </a:r>
+            <a:endParaRPr lang="en-IN" dirty="0"/>
           </a:p>
           <a:p>
             <a:r>
               <a:rPr lang="en-IN" dirty="0"/>
               <a:t>L3 group is whole chip</a:t>
             </a:r>
+            <a:endParaRPr lang="en-IN" dirty="0"/>
           </a:p>
           <a:p>
             <a:r>
               <a:rPr lang="en-IN" dirty="0"/>
               <a:t>Built-in memory interface allows to attach memory and other sockets without chipset</a:t>
             </a:r>
+            <a:endParaRPr lang="en-IN" dirty="0"/>
           </a:p>
           <a:p>
             <a:r>
@@ -17218,6 +17234,7 @@
               <a:rPr lang="en-IN" dirty="0"/>
               <a:t> and Intel Nehalem</a:t>
             </a:r>
+            <a:endParaRPr lang="en-IN" dirty="0"/>
           </a:p>
           <a:p>
             <a:endParaRPr lang="en-US" dirty="0"/>
@@ -17380,6 +17397,7 @@
                     <a:rPr lang="en-IN" sz="4400" b="1" dirty="0"/>
                     <a:t>P</a:t>
                   </a:r>
+                  <a:endParaRPr lang="en-IN" sz="4400" b="1" dirty="0"/>
                 </a:p>
               </p:txBody>
             </p:sp>
@@ -17421,6 +17439,7 @@
                     <a:rPr lang="en-IN" b="1" dirty="0"/>
                     <a:t>L1D</a:t>
                   </a:r>
+                  <a:endParaRPr lang="en-IN" b="1" dirty="0"/>
                 </a:p>
               </p:txBody>
             </p:sp>
@@ -17491,6 +17510,7 @@
                       <a:rPr lang="en-IN" sz="4400" b="1" dirty="0"/>
                       <a:t>P</a:t>
                     </a:r>
+                    <a:endParaRPr lang="en-IN" sz="4400" b="1" dirty="0"/>
                   </a:p>
                 </p:txBody>
               </p:sp>
@@ -17532,6 +17552,7 @@
                       <a:rPr lang="en-IN" b="1" dirty="0"/>
                       <a:t>L1D</a:t>
                     </a:r>
+                    <a:endParaRPr lang="en-IN" b="1" dirty="0"/>
                   </a:p>
                 </p:txBody>
               </p:sp>
@@ -17573,6 +17594,7 @@
                       <a:rPr lang="en-IN" b="1" dirty="0"/>
                       <a:t>L3</a:t>
                     </a:r>
+                    <a:endParaRPr lang="en-IN" b="1" dirty="0"/>
                   </a:p>
                 </p:txBody>
               </p:sp>
@@ -17629,6 +17651,7 @@
                       <a:rPr lang="en-IN" sz="4400" b="1" dirty="0"/>
                       <a:t>P</a:t>
                     </a:r>
+                    <a:endParaRPr lang="en-IN" sz="4400" b="1" dirty="0"/>
                   </a:p>
                 </p:txBody>
               </p:sp>
@@ -17670,6 +17693,7 @@
                       <a:rPr lang="en-IN" b="1" dirty="0"/>
                       <a:t>L1D</a:t>
                     </a:r>
+                    <a:endParaRPr lang="en-IN" b="1" dirty="0"/>
                   </a:p>
                 </p:txBody>
               </p:sp>
@@ -17711,6 +17735,7 @@
                       <a:rPr lang="en-IN" b="1" dirty="0"/>
                       <a:t>L2</a:t>
                     </a:r>
+                    <a:endParaRPr lang="en-IN" b="1" dirty="0"/>
                   </a:p>
                 </p:txBody>
               </p:sp>
@@ -17767,6 +17792,7 @@
                       <a:rPr lang="en-IN" sz="4400" b="1" dirty="0"/>
                       <a:t>P</a:t>
                     </a:r>
+                    <a:endParaRPr lang="en-IN" sz="4400" b="1" dirty="0"/>
                   </a:p>
                 </p:txBody>
               </p:sp>
@@ -17808,6 +17834,7 @@
                       <a:rPr lang="en-IN" b="1" dirty="0"/>
                       <a:t>L1D</a:t>
                     </a:r>
+                    <a:endParaRPr lang="en-IN" b="1" dirty="0"/>
                   </a:p>
                 </p:txBody>
               </p:sp>
@@ -17849,6 +17876,7 @@
                       <a:rPr lang="en-IN" b="1" dirty="0"/>
                       <a:t>L2</a:t>
                     </a:r>
+                    <a:endParaRPr lang="en-IN" b="1" dirty="0"/>
                   </a:p>
                 </p:txBody>
               </p:sp>
@@ -17932,6 +17960,7 @@
               <a:rPr lang="en-IN" b="1" dirty="0"/>
               <a:t>Memory Interface</a:t>
             </a:r>
+            <a:endParaRPr lang="en-IN" b="1" dirty="0"/>
           </a:p>
         </p:txBody>
       </p:sp>
@@ -17996,6 +18025,7 @@
               <a:rPr lang="en-IN" b="1" dirty="0"/>
               <a:t>HT/QPI</a:t>
             </a:r>
+            <a:endParaRPr lang="en-IN" b="1" dirty="0"/>
           </a:p>
         </p:txBody>
       </p:sp>
@@ -18037,6 +18067,7 @@
               <a:rPr lang="en-IN" b="1" dirty="0"/>
               <a:t>L2</a:t>
             </a:r>
+            <a:endParaRPr lang="en-IN" b="1" dirty="0"/>
           </a:p>
         </p:txBody>
       </p:sp>
@@ -18078,6 +18109,7 @@
               <a:rPr lang="en-IN" b="1" dirty="0"/>
               <a:t>L2</a:t>
             </a:r>
+            <a:endParaRPr lang="en-IN" b="1" dirty="0"/>
           </a:p>
         </p:txBody>
       </p:sp>
@@ -18117,11 +18149,6 @@
         </p:style>
       </p:cxnSp>
     </p:spTree>
-    <p:extLst>
-      <p:ext uri="{BB962C8B-B14F-4D97-AF65-F5344CB8AC3E}">
-        <p14:creationId xmlns:p14="http://schemas.microsoft.com/office/powerpoint/2010/main" val="3167805295"/>
-      </p:ext>
-    </p:extLst>
   </p:cSld>
   <p:clrMapOvr>
     <a:masterClrMapping/>
@@ -18188,12 +18215,14 @@
               <a:rPr lang="en-IN" dirty="0"/>
               <a:t>A system where the number of CPUs work on the physical address space</a:t>
             </a:r>
+            <a:endParaRPr lang="en-IN" dirty="0"/>
           </a:p>
           <a:p>
             <a:r>
               <a:rPr lang="en-IN" dirty="0"/>
               <a:t>Two varieties: </a:t>
             </a:r>
+            <a:endParaRPr lang="en-IN" dirty="0"/>
           </a:p>
           <a:p>
             <a:pPr lvl="1"/>
@@ -18201,6 +18230,7 @@
               <a:rPr lang="en-IN" dirty="0"/>
               <a:t>Uniform Memory Access (UMA)</a:t>
             </a:r>
+            <a:endParaRPr lang="en-IN" dirty="0"/>
           </a:p>
           <a:p>
             <a:pPr lvl="1"/>
@@ -18216,6 +18246,7 @@
               <a:rPr lang="en-IN" dirty="0"/>
               <a:t>)</a:t>
             </a:r>
+            <a:endParaRPr lang="en-IN" dirty="0"/>
           </a:p>
           <a:p>
             <a:endParaRPr lang="en-US" dirty="0"/>
@@ -18246,11 +18277,6 @@
         </p:txBody>
       </p:sp>
     </p:spTree>
-    <p:extLst>
-      <p:ext uri="{BB962C8B-B14F-4D97-AF65-F5344CB8AC3E}">
-        <p14:creationId xmlns:p14="http://schemas.microsoft.com/office/powerpoint/2010/main" val="4105121372"/>
-      </p:ext>
-    </p:extLst>
   </p:cSld>
   <p:clrMapOvr>
     <a:masterClrMapping/>
@@ -18294,6 +18320,7 @@
               <a:rPr lang="en-US" dirty="0"/>
               <a:t>UMA</a:t>
             </a:r>
+            <a:endParaRPr lang="en-US" dirty="0"/>
           </a:p>
         </p:txBody>
       </p:sp>
@@ -18316,18 +18343,21 @@
               <a:rPr lang="en-IN" dirty="0"/>
               <a:t>Known as Symmetric Multi Processing (SMP)</a:t>
             </a:r>
+            <a:endParaRPr lang="en-IN" dirty="0"/>
           </a:p>
           <a:p>
             <a:r>
               <a:rPr lang="en-IN" dirty="0"/>
               <a:t>Latency and Bandwidth are the same for all the processors</a:t>
             </a:r>
+            <a:endParaRPr lang="en-IN" dirty="0"/>
           </a:p>
           <a:p>
             <a:r>
               <a:rPr lang="en-IN" dirty="0"/>
               <a:t>Simplest implementation is Dual-core</a:t>
             </a:r>
+            <a:endParaRPr lang="en-IN" dirty="0"/>
           </a:p>
           <a:p>
             <a:endParaRPr lang="en-US" dirty="0"/>
@@ -18358,11 +18388,6 @@
         </p:txBody>
       </p:sp>
     </p:spTree>
-    <p:extLst>
-      <p:ext uri="{BB962C8B-B14F-4D97-AF65-F5344CB8AC3E}">
-        <p14:creationId xmlns:p14="http://schemas.microsoft.com/office/powerpoint/2010/main" val="4035954543"/>
-      </p:ext>
-    </p:extLst>
   </p:cSld>
   <p:clrMapOvr>
     <a:masterClrMapping/>
@@ -18474,6 +18499,7 @@
               <a:rPr lang="en-IN" b="1" dirty="0"/>
               <a:t>Chipset</a:t>
             </a:r>
+            <a:endParaRPr lang="en-IN" b="1" dirty="0"/>
           </a:p>
         </p:txBody>
       </p:sp>
@@ -18518,6 +18544,7 @@
               <a:rPr lang="en-IN" b="1" dirty="0"/>
               <a:t>Memory</a:t>
             </a:r>
+            <a:endParaRPr lang="en-IN" b="1" dirty="0"/>
           </a:p>
         </p:txBody>
       </p:sp>
@@ -18682,6 +18709,7 @@
               <a:rPr lang="en-IN" sz="4400" b="1" dirty="0"/>
               <a:t>P</a:t>
             </a:r>
+            <a:endParaRPr lang="en-IN" sz="4400" b="1" dirty="0"/>
           </a:p>
         </p:txBody>
       </p:sp>
@@ -18723,6 +18751,7 @@
               <a:rPr lang="en-IN" b="1" dirty="0"/>
               <a:t>L1D</a:t>
             </a:r>
+            <a:endParaRPr lang="en-IN" b="1" dirty="0"/>
           </a:p>
         </p:txBody>
       </p:sp>
@@ -18764,6 +18793,7 @@
               <a:rPr lang="en-IN" b="1" dirty="0"/>
               <a:t>L2</a:t>
             </a:r>
+            <a:endParaRPr lang="en-IN" b="1" dirty="0"/>
           </a:p>
         </p:txBody>
       </p:sp>
@@ -18858,6 +18888,7 @@
               <a:rPr lang="en-IN" sz="4400" b="1" dirty="0"/>
               <a:t>P</a:t>
             </a:r>
+            <a:endParaRPr lang="en-IN" sz="4400" b="1" dirty="0"/>
           </a:p>
         </p:txBody>
       </p:sp>
@@ -18899,6 +18930,7 @@
               <a:rPr lang="en-IN" b="1" dirty="0"/>
               <a:t>L1D</a:t>
             </a:r>
+            <a:endParaRPr lang="en-IN" b="1" dirty="0"/>
           </a:p>
         </p:txBody>
       </p:sp>
@@ -18940,6 +18972,7 @@
               <a:rPr lang="en-IN" b="1" dirty="0"/>
               <a:t>L2</a:t>
             </a:r>
+            <a:endParaRPr lang="en-IN" b="1" dirty="0"/>
           </a:p>
         </p:txBody>
       </p:sp>
@@ -19084,6 +19117,7 @@
               <a:rPr lang="en-IN" b="1" dirty="0"/>
               <a:t>Socket</a:t>
             </a:r>
+            <a:endParaRPr lang="en-IN" b="1" dirty="0"/>
           </a:p>
         </p:txBody>
       </p:sp>
@@ -19153,15 +19187,11 @@
               <a:rPr lang="en-IN" b="1" dirty="0"/>
               <a:t>Common Front Side Bus (FSB)</a:t>
             </a:r>
+            <a:endParaRPr lang="en-IN" b="1" dirty="0"/>
           </a:p>
         </p:txBody>
       </p:sp>
     </p:spTree>
-    <p:extLst>
-      <p:ext uri="{BB962C8B-B14F-4D97-AF65-F5344CB8AC3E}">
-        <p14:creationId xmlns:p14="http://schemas.microsoft.com/office/powerpoint/2010/main" val="3615370623"/>
-      </p:ext>
-    </p:extLst>
   </p:cSld>
   <p:clrMapOvr>
     <a:masterClrMapping/>
@@ -19342,6 +19372,7 @@
               <a:rPr lang="en-IN" sz="4400" b="1" dirty="0"/>
               <a:t>P</a:t>
             </a:r>
+            <a:endParaRPr lang="en-IN" sz="4400" b="1" dirty="0"/>
           </a:p>
         </p:txBody>
       </p:sp>
@@ -19383,6 +19414,7 @@
               <a:rPr lang="en-IN" b="1" dirty="0"/>
               <a:t>L1D</a:t>
             </a:r>
+            <a:endParaRPr lang="en-IN" b="1" dirty="0"/>
           </a:p>
         </p:txBody>
       </p:sp>
@@ -19424,6 +19456,7 @@
               <a:rPr lang="en-IN" sz="4400" b="1" dirty="0"/>
               <a:t>P</a:t>
             </a:r>
+            <a:endParaRPr lang="en-IN" sz="4400" b="1" dirty="0"/>
           </a:p>
         </p:txBody>
       </p:sp>
@@ -19465,6 +19498,7 @@
               <a:rPr lang="en-IN" b="1" dirty="0"/>
               <a:t>L1D</a:t>
             </a:r>
+            <a:endParaRPr lang="en-IN" b="1" dirty="0"/>
           </a:p>
         </p:txBody>
       </p:sp>
@@ -19506,6 +19540,7 @@
               <a:rPr lang="en-IN" b="1" dirty="0"/>
               <a:t>L2</a:t>
             </a:r>
+            <a:endParaRPr lang="en-IN" b="1" dirty="0"/>
           </a:p>
         </p:txBody>
       </p:sp>
@@ -19550,6 +19585,7 @@
               <a:rPr lang="en-IN" b="1" dirty="0"/>
               <a:t>Chipset</a:t>
             </a:r>
+            <a:endParaRPr lang="en-IN" b="1" dirty="0"/>
           </a:p>
         </p:txBody>
       </p:sp>
@@ -19596,6 +19632,7 @@
               <a:rPr lang="en-IN" b="1" dirty="0"/>
               <a:t>Memory</a:t>
             </a:r>
+            <a:endParaRPr lang="en-IN" b="1" dirty="0"/>
           </a:p>
         </p:txBody>
       </p:sp>
@@ -19690,6 +19727,7 @@
               <a:rPr lang="en-IN" sz="4400" b="1" dirty="0"/>
               <a:t>P</a:t>
             </a:r>
+            <a:endParaRPr lang="en-IN" sz="4400" b="1" dirty="0"/>
           </a:p>
         </p:txBody>
       </p:sp>
@@ -19731,6 +19769,7 @@
               <a:rPr lang="en-IN" b="1" dirty="0"/>
               <a:t>L1D</a:t>
             </a:r>
+            <a:endParaRPr lang="en-IN" b="1" dirty="0"/>
           </a:p>
         </p:txBody>
       </p:sp>
@@ -19772,6 +19811,7 @@
               <a:rPr lang="en-IN" sz="4400" b="1" dirty="0"/>
               <a:t>P</a:t>
             </a:r>
+            <a:endParaRPr lang="en-IN" sz="4400" b="1" dirty="0"/>
           </a:p>
         </p:txBody>
       </p:sp>
@@ -19813,6 +19853,7 @@
               <a:rPr lang="en-IN" b="1" dirty="0"/>
               <a:t>L1D</a:t>
             </a:r>
+            <a:endParaRPr lang="en-IN" b="1" dirty="0"/>
           </a:p>
         </p:txBody>
       </p:sp>
@@ -19854,6 +19895,7 @@
               <a:rPr lang="en-IN" b="1" dirty="0"/>
               <a:t>L2</a:t>
             </a:r>
+            <a:endParaRPr lang="en-IN" b="1" dirty="0"/>
           </a:p>
         </p:txBody>
       </p:sp>
@@ -20061,15 +20103,11 @@
               <a:rPr lang="en-IN" b="1" dirty="0"/>
               <a:t>Socket</a:t>
             </a:r>
+            <a:endParaRPr lang="en-IN" b="1" dirty="0"/>
           </a:p>
         </p:txBody>
       </p:sp>
     </p:spTree>
-    <p:extLst>
-      <p:ext uri="{BB962C8B-B14F-4D97-AF65-F5344CB8AC3E}">
-        <p14:creationId xmlns:p14="http://schemas.microsoft.com/office/powerpoint/2010/main" val="3649306505"/>
-      </p:ext>
-    </p:extLst>
   </p:cSld>
   <p:clrMapOvr>
     <a:masterClrMapping/>
@@ -20138,18 +20176,21 @@
               <a:rPr lang="en-IN" dirty="0"/>
               <a:t>Cache coherence mechanism is required</a:t>
             </a:r>
+            <a:endParaRPr lang="en-IN" dirty="0"/>
           </a:p>
           <a:p>
             <a:r>
               <a:rPr lang="en-IN" dirty="0"/>
               <a:t>Because of same copy of cache line is resided in in several caches</a:t>
             </a:r>
+            <a:endParaRPr lang="en-IN" dirty="0"/>
           </a:p>
           <a:p>
             <a:r>
               <a:rPr lang="en-IN" dirty="0"/>
               <a:t>If one of those caches get modified, other cache content needs to be reflected</a:t>
             </a:r>
+            <a:endParaRPr lang="en-IN" dirty="0"/>
           </a:p>
           <a:p>
             <a:endParaRPr lang="en-US" dirty="0"/>
@@ -20180,11 +20221,6 @@
         </p:txBody>
       </p:sp>
     </p:spTree>
-    <p:extLst>
-      <p:ext uri="{BB962C8B-B14F-4D97-AF65-F5344CB8AC3E}">
-        <p14:creationId xmlns:p14="http://schemas.microsoft.com/office/powerpoint/2010/main" val="1580302518"/>
-      </p:ext>
-    </p:extLst>
   </p:cSld>
   <p:clrMapOvr>
     <a:masterClrMapping/>
@@ -20260,6 +20296,7 @@
               <a:rPr lang="en-IN" i="1" dirty="0"/>
               <a:t>modified</a:t>
             </a:r>
+            <a:endParaRPr lang="en-IN" i="1" dirty="0"/>
           </a:p>
           <a:p>
             <a:r>
@@ -20281,6 +20318,7 @@
               <a:rPr lang="en-IN" i="1" dirty="0"/>
               <a:t>shared </a:t>
             </a:r>
+            <a:endParaRPr lang="en-IN" i="1" dirty="0"/>
           </a:p>
           <a:p>
             <a:r>
@@ -20387,6 +20425,7 @@
                   <a:rPr lang="en-IN" dirty="0"/>
                   <a:t>P1</a:t>
                 </a:r>
+                <a:endParaRPr lang="en-IN" dirty="0"/>
               </a:p>
             </p:txBody>
           </p:sp>
@@ -20428,6 +20467,7 @@
                   <a:rPr lang="en-IN" dirty="0"/>
                   <a:t>C1      </a:t>
                 </a:r>
+                <a:endParaRPr lang="en-IN" dirty="0"/>
               </a:p>
             </p:txBody>
           </p:sp>
@@ -20548,6 +20588,7 @@
                   <a:rPr lang="en-IN" dirty="0"/>
                   <a:t>A1    A2</a:t>
                 </a:r>
+                <a:endParaRPr lang="en-IN" dirty="0"/>
               </a:p>
             </p:txBody>
           </p:sp>
@@ -20643,6 +20684,7 @@
                   <a:rPr lang="en-IN" dirty="0"/>
                   <a:t>P2</a:t>
                 </a:r>
+                <a:endParaRPr lang="en-IN" dirty="0"/>
               </a:p>
             </p:txBody>
           </p:sp>
@@ -20684,6 +20726,7 @@
                   <a:rPr lang="en-IN" dirty="0"/>
                   <a:t>C2</a:t>
                 </a:r>
+                <a:endParaRPr lang="en-IN" dirty="0"/>
               </a:p>
             </p:txBody>
           </p:sp>
@@ -20804,6 +20847,7 @@
                   <a:rPr lang="en-IN" dirty="0"/>
                   <a:t>A1    A2</a:t>
                 </a:r>
+                <a:endParaRPr lang="en-IN" dirty="0"/>
               </a:p>
             </p:txBody>
           </p:sp>
@@ -20887,6 +20931,7 @@
                 <a:rPr lang="en-IN" dirty="0"/>
                 <a:t>3</a:t>
               </a:r>
+              <a:endParaRPr lang="en-IN" dirty="0"/>
             </a:p>
           </p:txBody>
         </p:sp>
@@ -20933,6 +20978,7 @@
                 <a:rPr lang="en-IN" dirty="0"/>
                 <a:t>7</a:t>
               </a:r>
+              <a:endParaRPr lang="en-IN" dirty="0"/>
             </a:p>
           </p:txBody>
         </p:sp>
@@ -21057,6 +21103,7 @@
                 <a:rPr lang="en-IN" dirty="0"/>
                 <a:t>Memory</a:t>
               </a:r>
+              <a:endParaRPr lang="en-IN" dirty="0"/>
             </a:p>
           </p:txBody>
         </p:sp>
@@ -21165,6 +21212,7 @@
                 <a:rPr lang="en-IN" dirty="0"/>
                 <a:t>A1</a:t>
               </a:r>
+              <a:endParaRPr lang="en-IN" dirty="0"/>
             </a:p>
           </p:txBody>
         </p:sp>
@@ -21194,16 +21242,12 @@
                 <a:rPr lang="en-IN" dirty="0"/>
                 <a:t>A2</a:t>
               </a:r>
+              <a:endParaRPr lang="en-IN" dirty="0"/>
             </a:p>
           </p:txBody>
         </p:sp>
       </p:grpSp>
     </p:spTree>
-    <p:extLst>
-      <p:ext uri="{BB962C8B-B14F-4D97-AF65-F5344CB8AC3E}">
-        <p14:creationId xmlns:p14="http://schemas.microsoft.com/office/powerpoint/2010/main" val="4001897647"/>
-      </p:ext>
-    </p:extLst>
   </p:cSld>
   <p:clrMapOvr>
     <a:masterClrMapping/>
@@ -21273,36 +21317,42 @@
               <a:rPr lang="en-IN" dirty="0"/>
               <a:t>1. C1 requests exclusive CL ownership</a:t>
             </a:r>
+            <a:endParaRPr lang="en-IN" dirty="0"/>
           </a:p>
           <a:p>
             <a:r>
               <a:rPr lang="en-IN" dirty="0"/>
               <a:t>2. set CL in C2 to state I</a:t>
             </a:r>
+            <a:endParaRPr lang="en-IN" dirty="0"/>
           </a:p>
           <a:p>
             <a:r>
               <a:rPr lang="en-IN" dirty="0"/>
               <a:t>3. CL has state E in C1 → modify A1 in C1 and set to state M</a:t>
             </a:r>
+            <a:endParaRPr lang="en-IN" dirty="0"/>
           </a:p>
           <a:p>
             <a:r>
               <a:rPr lang="en-IN" dirty="0"/>
               <a:t>4. C2 requests exclusive CL ownership</a:t>
             </a:r>
+            <a:endParaRPr lang="en-IN" dirty="0"/>
           </a:p>
           <a:p>
             <a:r>
               <a:rPr lang="en-IN" dirty="0"/>
               <a:t>5. evict CL from C1 and set to state I</a:t>
             </a:r>
+            <a:endParaRPr lang="en-IN" dirty="0"/>
           </a:p>
           <a:p>
             <a:r>
               <a:rPr lang="en-IN" dirty="0"/>
               <a:t>6. load CL to C2 and set to state E</a:t>
             </a:r>
+            <a:endParaRPr lang="en-IN" dirty="0"/>
           </a:p>
           <a:p>
             <a:r>
@@ -21402,6 +21452,7 @@
                   <a:rPr lang="en-IN" dirty="0"/>
                   <a:t>P1</a:t>
                 </a:r>
+                <a:endParaRPr lang="en-IN" dirty="0"/>
               </a:p>
             </p:txBody>
           </p:sp>
@@ -21443,6 +21494,7 @@
                   <a:rPr lang="en-IN" dirty="0"/>
                   <a:t>C1      </a:t>
                 </a:r>
+                <a:endParaRPr lang="en-IN" dirty="0"/>
               </a:p>
             </p:txBody>
           </p:sp>
@@ -21563,6 +21615,7 @@
                   <a:rPr lang="en-IN" dirty="0"/>
                   <a:t>A1    A2</a:t>
                 </a:r>
+                <a:endParaRPr lang="en-IN" dirty="0"/>
               </a:p>
             </p:txBody>
           </p:sp>
@@ -21658,6 +21711,7 @@
                   <a:rPr lang="en-IN" dirty="0"/>
                   <a:t>P2</a:t>
                 </a:r>
+                <a:endParaRPr lang="en-IN" dirty="0"/>
               </a:p>
             </p:txBody>
           </p:sp>
@@ -21699,6 +21753,7 @@
                   <a:rPr lang="en-IN" dirty="0"/>
                   <a:t>C2</a:t>
                 </a:r>
+                <a:endParaRPr lang="en-IN" dirty="0"/>
               </a:p>
             </p:txBody>
           </p:sp>
@@ -21819,6 +21874,7 @@
                   <a:rPr lang="en-IN" dirty="0"/>
                   <a:t>A1    A2</a:t>
                 </a:r>
+                <a:endParaRPr lang="en-IN" dirty="0"/>
               </a:p>
             </p:txBody>
           </p:sp>
@@ -21902,6 +21958,7 @@
                 <a:rPr lang="en-IN" dirty="0"/>
                 <a:t>3</a:t>
               </a:r>
+              <a:endParaRPr lang="en-IN" dirty="0"/>
             </a:p>
           </p:txBody>
         </p:sp>
@@ -21948,6 +22005,7 @@
                 <a:rPr lang="en-IN" dirty="0"/>
                 <a:t>7</a:t>
               </a:r>
+              <a:endParaRPr lang="en-IN" dirty="0"/>
             </a:p>
           </p:txBody>
         </p:sp>
@@ -22072,6 +22130,7 @@
                 <a:rPr lang="en-IN" dirty="0"/>
                 <a:t>Memory</a:t>
               </a:r>
+              <a:endParaRPr lang="en-IN" dirty="0"/>
             </a:p>
           </p:txBody>
         </p:sp>
@@ -22180,6 +22239,7 @@
                 <a:rPr lang="en-IN" dirty="0"/>
                 <a:t>A1</a:t>
               </a:r>
+              <a:endParaRPr lang="en-IN" dirty="0"/>
             </a:p>
           </p:txBody>
         </p:sp>
@@ -22209,6 +22269,7 @@
                 <a:rPr lang="en-IN" dirty="0"/>
                 <a:t>A2</a:t>
               </a:r>
+              <a:endParaRPr lang="en-IN" dirty="0"/>
             </a:p>
           </p:txBody>
         </p:sp>
@@ -22240,15 +22301,11 @@
               <a:rPr lang="en-IN" sz="1600" b="1" dirty="0"/>
               <a:t>Courtesy: Hager, G. (2017). Introduction To high performance computing for scientists and engineers: CRC press</a:t>
             </a:r>
+            <a:endParaRPr lang="en-IN" sz="1600" b="1" dirty="0"/>
           </a:p>
         </p:txBody>
       </p:sp>
     </p:spTree>
-    <p:extLst>
-      <p:ext uri="{BB962C8B-B14F-4D97-AF65-F5344CB8AC3E}">
-        <p14:creationId xmlns:p14="http://schemas.microsoft.com/office/powerpoint/2010/main" val="2291718359"/>
-      </p:ext>
-    </p:extLst>
   </p:cSld>
   <p:clrMapOvr>
     <a:masterClrMapping/>
@@ -22323,6 +22380,7 @@
               <a:rPr lang="en-IN" dirty="0"/>
               <a:t> chip doubles every 24 months independent of technology used</a:t>
             </a:r>
+            <a:endParaRPr lang="en-IN" dirty="0"/>
           </a:p>
           <a:p>
             <a:pPr lvl="1"/>
@@ -22330,6 +22388,7 @@
               <a:rPr lang="en-IN" dirty="0"/>
               <a:t>@Gordon Moore, Co-founder of Intel Corp (1965)</a:t>
             </a:r>
+            <a:endParaRPr lang="en-IN" dirty="0"/>
           </a:p>
           <a:p>
             <a:endParaRPr lang="en-US" dirty="0"/>
@@ -22360,11 +22419,6 @@
         </p:txBody>
       </p:sp>
     </p:spTree>
-    <p:extLst>
-      <p:ext uri="{BB962C8B-B14F-4D97-AF65-F5344CB8AC3E}">
-        <p14:creationId xmlns:p14="http://schemas.microsoft.com/office/powerpoint/2010/main" val="3108142370"/>
-      </p:ext>
-    </p:extLst>
   </p:cSld>
   <p:clrMapOvr>
     <a:masterClrMapping/>
@@ -22554,6 +22608,7 @@
               <a:rPr lang="en-IN" sz="4400" b="1" dirty="0"/>
               <a:t>P</a:t>
             </a:r>
+            <a:endParaRPr lang="en-IN" sz="4400" b="1" dirty="0"/>
           </a:p>
         </p:txBody>
       </p:sp>
@@ -22595,6 +22650,7 @@
               <a:rPr lang="en-IN" b="1" dirty="0"/>
               <a:t>L1D</a:t>
             </a:r>
+            <a:endParaRPr lang="en-IN" b="1" dirty="0"/>
           </a:p>
         </p:txBody>
       </p:sp>
@@ -22636,6 +22692,7 @@
               <a:rPr lang="en-IN" sz="4400" b="1" dirty="0"/>
               <a:t>P</a:t>
             </a:r>
+            <a:endParaRPr lang="en-IN" sz="4400" b="1" dirty="0"/>
           </a:p>
         </p:txBody>
       </p:sp>
@@ -22677,6 +22734,7 @@
               <a:rPr lang="en-IN" b="1" dirty="0"/>
               <a:t>L1D</a:t>
             </a:r>
+            <a:endParaRPr lang="en-IN" b="1" dirty="0"/>
           </a:p>
         </p:txBody>
       </p:sp>
@@ -22718,6 +22776,7 @@
               <a:rPr lang="en-IN" b="1" dirty="0"/>
               <a:t>L3</a:t>
             </a:r>
+            <a:endParaRPr lang="en-IN" b="1" dirty="0"/>
           </a:p>
         </p:txBody>
       </p:sp>
@@ -22759,6 +22818,7 @@
               <a:rPr lang="en-IN" sz="4400" b="1" dirty="0"/>
               <a:t>P</a:t>
             </a:r>
+            <a:endParaRPr lang="en-IN" sz="4400" b="1" dirty="0"/>
           </a:p>
         </p:txBody>
       </p:sp>
@@ -22800,6 +22860,7 @@
               <a:rPr lang="en-IN" b="1" dirty="0"/>
               <a:t>L1D</a:t>
             </a:r>
+            <a:endParaRPr lang="en-IN" b="1" dirty="0"/>
           </a:p>
         </p:txBody>
       </p:sp>
@@ -22841,6 +22902,7 @@
               <a:rPr lang="en-IN" b="1" dirty="0"/>
               <a:t>L2</a:t>
             </a:r>
+            <a:endParaRPr lang="en-IN" b="1" dirty="0"/>
           </a:p>
         </p:txBody>
       </p:sp>
@@ -22882,6 +22944,7 @@
               <a:rPr lang="en-IN" sz="4400" b="1" dirty="0"/>
               <a:t>P</a:t>
             </a:r>
+            <a:endParaRPr lang="en-IN" sz="4400" b="1" dirty="0"/>
           </a:p>
         </p:txBody>
       </p:sp>
@@ -22923,6 +22986,7 @@
               <a:rPr lang="en-IN" b="1" dirty="0"/>
               <a:t>L1D</a:t>
             </a:r>
+            <a:endParaRPr lang="en-IN" b="1" dirty="0"/>
           </a:p>
         </p:txBody>
       </p:sp>
@@ -22964,6 +23028,7 @@
               <a:rPr lang="en-IN" b="1" dirty="0"/>
               <a:t>L2</a:t>
             </a:r>
+            <a:endParaRPr lang="en-IN" b="1" dirty="0"/>
           </a:p>
         </p:txBody>
       </p:sp>
@@ -23005,6 +23070,7 @@
               <a:rPr lang="en-IN" b="1" dirty="0"/>
               <a:t>L2</a:t>
             </a:r>
+            <a:endParaRPr lang="en-IN" b="1" dirty="0"/>
           </a:p>
         </p:txBody>
       </p:sp>
@@ -23046,6 +23112,7 @@
               <a:rPr lang="en-IN" b="1" dirty="0"/>
               <a:t>L2</a:t>
             </a:r>
+            <a:endParaRPr lang="en-IN" b="1" dirty="0"/>
           </a:p>
         </p:txBody>
       </p:sp>
@@ -23092,6 +23159,7 @@
               <a:rPr lang="en-IN" b="1" dirty="0"/>
               <a:t>Memory Interface</a:t>
             </a:r>
+            <a:endParaRPr lang="en-IN" b="1" dirty="0"/>
           </a:p>
         </p:txBody>
       </p:sp>
@@ -23136,6 +23204,7 @@
               <a:rPr lang="en-IN" b="1" dirty="0"/>
               <a:t>Memory</a:t>
             </a:r>
+            <a:endParaRPr lang="en-IN" b="1" dirty="0"/>
           </a:p>
         </p:txBody>
       </p:sp>
@@ -23303,6 +23372,7 @@
               <a:rPr lang="en-IN" sz="4400" b="1" dirty="0"/>
               <a:t>P</a:t>
             </a:r>
+            <a:endParaRPr lang="en-IN" sz="4400" b="1" dirty="0"/>
           </a:p>
         </p:txBody>
       </p:sp>
@@ -23344,6 +23414,7 @@
               <a:rPr lang="en-IN" b="1" dirty="0"/>
               <a:t>L1D</a:t>
             </a:r>
+            <a:endParaRPr lang="en-IN" b="1" dirty="0"/>
           </a:p>
         </p:txBody>
       </p:sp>
@@ -23385,6 +23456,7 @@
               <a:rPr lang="en-IN" sz="4400" b="1" dirty="0"/>
               <a:t>P</a:t>
             </a:r>
+            <a:endParaRPr lang="en-IN" sz="4400" b="1" dirty="0"/>
           </a:p>
         </p:txBody>
       </p:sp>
@@ -23426,6 +23498,7 @@
               <a:rPr lang="en-IN" b="1" dirty="0"/>
               <a:t>L1D</a:t>
             </a:r>
+            <a:endParaRPr lang="en-IN" b="1" dirty="0"/>
           </a:p>
         </p:txBody>
       </p:sp>
@@ -23467,6 +23540,7 @@
               <a:rPr lang="en-IN" b="1" dirty="0"/>
               <a:t>L3</a:t>
             </a:r>
+            <a:endParaRPr lang="en-IN" b="1" dirty="0"/>
           </a:p>
         </p:txBody>
       </p:sp>
@@ -23508,6 +23582,7 @@
               <a:rPr lang="en-IN" sz="4400" b="1" dirty="0"/>
               <a:t>P</a:t>
             </a:r>
+            <a:endParaRPr lang="en-IN" sz="4400" b="1" dirty="0"/>
           </a:p>
         </p:txBody>
       </p:sp>
@@ -23549,6 +23624,7 @@
               <a:rPr lang="en-IN" b="1" dirty="0"/>
               <a:t>L1D</a:t>
             </a:r>
+            <a:endParaRPr lang="en-IN" b="1" dirty="0"/>
           </a:p>
         </p:txBody>
       </p:sp>
@@ -23590,6 +23666,7 @@
               <a:rPr lang="en-IN" b="1" dirty="0"/>
               <a:t>L2</a:t>
             </a:r>
+            <a:endParaRPr lang="en-IN" b="1" dirty="0"/>
           </a:p>
         </p:txBody>
       </p:sp>
@@ -23631,6 +23708,7 @@
               <a:rPr lang="en-IN" sz="4400" b="1" dirty="0"/>
               <a:t>P</a:t>
             </a:r>
+            <a:endParaRPr lang="en-IN" sz="4400" b="1" dirty="0"/>
           </a:p>
         </p:txBody>
       </p:sp>
@@ -23672,6 +23750,7 @@
               <a:rPr lang="en-IN" b="1" dirty="0"/>
               <a:t>L1D</a:t>
             </a:r>
+            <a:endParaRPr lang="en-IN" b="1" dirty="0"/>
           </a:p>
         </p:txBody>
       </p:sp>
@@ -23713,6 +23792,7 @@
               <a:rPr lang="en-IN" b="1" dirty="0"/>
               <a:t>L2</a:t>
             </a:r>
+            <a:endParaRPr lang="en-IN" b="1" dirty="0"/>
           </a:p>
         </p:txBody>
       </p:sp>
@@ -23754,6 +23834,7 @@
               <a:rPr lang="en-IN" b="1" dirty="0"/>
               <a:t>L2</a:t>
             </a:r>
+            <a:endParaRPr lang="en-IN" b="1" dirty="0"/>
           </a:p>
         </p:txBody>
       </p:sp>
@@ -23795,6 +23876,7 @@
               <a:rPr lang="en-IN" b="1" dirty="0"/>
               <a:t>L2</a:t>
             </a:r>
+            <a:endParaRPr lang="en-IN" b="1" dirty="0"/>
           </a:p>
         </p:txBody>
       </p:sp>
@@ -23841,6 +23923,7 @@
               <a:rPr lang="en-IN" b="1" dirty="0"/>
               <a:t>Memory Interface</a:t>
             </a:r>
+            <a:endParaRPr lang="en-IN" b="1" dirty="0"/>
           </a:p>
         </p:txBody>
       </p:sp>
@@ -23885,6 +23968,7 @@
               <a:rPr lang="en-IN" b="1" dirty="0"/>
               <a:t>Memory</a:t>
             </a:r>
+            <a:endParaRPr lang="en-IN" b="1" dirty="0"/>
           </a:p>
         </p:txBody>
       </p:sp>
@@ -24024,21 +24108,18 @@
               <a:rPr lang="en-IN" b="1" dirty="0"/>
               <a:t>Coherent</a:t>
             </a:r>
+            <a:endParaRPr lang="en-IN" b="1" dirty="0"/>
           </a:p>
           <a:p>
             <a:r>
               <a:rPr lang="en-IN" b="1" dirty="0"/>
               <a:t>Link</a:t>
             </a:r>
+            <a:endParaRPr lang="en-IN" b="1" dirty="0"/>
           </a:p>
         </p:txBody>
       </p:sp>
     </p:spTree>
-    <p:extLst>
-      <p:ext uri="{BB962C8B-B14F-4D97-AF65-F5344CB8AC3E}">
-        <p14:creationId xmlns:p14="http://schemas.microsoft.com/office/powerpoint/2010/main" val="3711929355"/>
-      </p:ext>
-    </p:extLst>
   </p:cSld>
   <p:clrMapOvr>
     <a:masterClrMapping/>
@@ -24239,6 +24320,7 @@
                   <a:rPr lang="en-IN" dirty="0"/>
                   <a:t>P</a:t>
                 </a:r>
+                <a:endParaRPr lang="en-IN" dirty="0"/>
               </a:p>
             </p:txBody>
           </p:sp>
@@ -24282,6 +24364,7 @@
                   <a:rPr lang="en-IN" dirty="0"/>
                   <a:t>C</a:t>
                 </a:r>
+                <a:endParaRPr lang="en-IN" dirty="0"/>
               </a:p>
             </p:txBody>
           </p:sp>
@@ -24325,6 +24408,7 @@
                   <a:rPr lang="en-IN" dirty="0"/>
                   <a:t>M</a:t>
                 </a:r>
+                <a:endParaRPr lang="en-IN" dirty="0"/>
               </a:p>
             </p:txBody>
           </p:sp>
@@ -24368,6 +24452,7 @@
                   <a:rPr lang="en-IN" dirty="0"/>
                   <a:t>NI</a:t>
                 </a:r>
+                <a:endParaRPr lang="en-IN" dirty="0"/>
               </a:p>
             </p:txBody>
           </p:sp>
@@ -24541,6 +24626,7 @@
                   <a:rPr lang="en-IN" dirty="0"/>
                   <a:t>P</a:t>
                 </a:r>
+                <a:endParaRPr lang="en-IN" dirty="0"/>
               </a:p>
             </p:txBody>
           </p:sp>
@@ -24584,6 +24670,7 @@
                   <a:rPr lang="en-IN" dirty="0"/>
                   <a:t>C</a:t>
                 </a:r>
+                <a:endParaRPr lang="en-IN" dirty="0"/>
               </a:p>
             </p:txBody>
           </p:sp>
@@ -24627,6 +24714,7 @@
                   <a:rPr lang="en-IN" dirty="0"/>
                   <a:t>M</a:t>
                 </a:r>
+                <a:endParaRPr lang="en-IN" dirty="0"/>
               </a:p>
             </p:txBody>
           </p:sp>
@@ -24670,6 +24758,7 @@
                   <a:rPr lang="en-IN" dirty="0"/>
                   <a:t>NI</a:t>
                 </a:r>
+                <a:endParaRPr lang="en-IN" dirty="0"/>
               </a:p>
             </p:txBody>
           </p:sp>
@@ -24843,6 +24932,7 @@
                   <a:rPr lang="en-IN" dirty="0"/>
                   <a:t>P</a:t>
                 </a:r>
+                <a:endParaRPr lang="en-IN" dirty="0"/>
               </a:p>
             </p:txBody>
           </p:sp>
@@ -24886,6 +24976,7 @@
                   <a:rPr lang="en-IN" dirty="0"/>
                   <a:t>C</a:t>
                 </a:r>
+                <a:endParaRPr lang="en-IN" dirty="0"/>
               </a:p>
             </p:txBody>
           </p:sp>
@@ -24929,6 +25020,7 @@
                   <a:rPr lang="en-IN" dirty="0"/>
                   <a:t>M</a:t>
                 </a:r>
+                <a:endParaRPr lang="en-IN" dirty="0"/>
               </a:p>
             </p:txBody>
           </p:sp>
@@ -24972,6 +25064,7 @@
                   <a:rPr lang="en-IN" dirty="0"/>
                   <a:t>NI</a:t>
                 </a:r>
+                <a:endParaRPr lang="en-IN" dirty="0"/>
               </a:p>
             </p:txBody>
           </p:sp>
@@ -25145,6 +25238,7 @@
                   <a:rPr lang="en-IN" dirty="0"/>
                   <a:t>P</a:t>
                 </a:r>
+                <a:endParaRPr lang="en-IN" dirty="0"/>
               </a:p>
             </p:txBody>
           </p:sp>
@@ -25188,6 +25282,7 @@
                   <a:rPr lang="en-IN" dirty="0"/>
                   <a:t>C</a:t>
                 </a:r>
+                <a:endParaRPr lang="en-IN" dirty="0"/>
               </a:p>
             </p:txBody>
           </p:sp>
@@ -25231,6 +25326,7 @@
                   <a:rPr lang="en-IN" dirty="0"/>
                   <a:t>M</a:t>
                 </a:r>
+                <a:endParaRPr lang="en-IN" dirty="0"/>
               </a:p>
             </p:txBody>
           </p:sp>
@@ -25274,6 +25370,7 @@
                   <a:rPr lang="en-IN" dirty="0"/>
                   <a:t>NI</a:t>
                 </a:r>
+                <a:endParaRPr lang="en-IN" dirty="0"/>
               </a:p>
             </p:txBody>
           </p:sp>
@@ -25390,6 +25487,7 @@
                 <a:rPr lang="en-IN" dirty="0"/>
                 <a:t>Communication Network</a:t>
               </a:r>
+              <a:endParaRPr lang="en-IN" dirty="0"/>
             </a:p>
           </p:txBody>
         </p:sp>
@@ -25560,33 +25658,32 @@
               <a:rPr lang="en-IN" b="1" dirty="0"/>
               <a:t>P-Processor</a:t>
             </a:r>
+            <a:endParaRPr lang="en-IN" b="1" dirty="0"/>
           </a:p>
           <a:p>
             <a:r>
               <a:rPr lang="en-IN" b="1" dirty="0"/>
               <a:t>C-Cache</a:t>
             </a:r>
+            <a:endParaRPr lang="en-IN" b="1" dirty="0"/>
           </a:p>
           <a:p>
             <a:r>
               <a:rPr lang="en-IN" b="1" dirty="0"/>
               <a:t>NI-Network Interface</a:t>
             </a:r>
+            <a:endParaRPr lang="en-IN" b="1" dirty="0"/>
           </a:p>
           <a:p>
             <a:r>
               <a:rPr lang="en-IN" b="1" dirty="0"/>
               <a:t>M-Memory</a:t>
             </a:r>
+            <a:endParaRPr lang="en-IN" b="1" dirty="0"/>
           </a:p>
         </p:txBody>
       </p:sp>
     </p:spTree>
-    <p:extLst>
-      <p:ext uri="{BB962C8B-B14F-4D97-AF65-F5344CB8AC3E}">
-        <p14:creationId xmlns:p14="http://schemas.microsoft.com/office/powerpoint/2010/main" val="4276218157"/>
-      </p:ext>
-    </p:extLst>
   </p:cSld>
   <p:clrMapOvr>
     <a:masterClrMapping/>
@@ -25630,6 +25727,7 @@
               <a:rPr lang="en-US" dirty="0"/>
               <a:t>Reference </a:t>
             </a:r>
+            <a:endParaRPr lang="en-US" dirty="0"/>
           </a:p>
         </p:txBody>
       </p:sp>
@@ -25652,6 +25750,7 @@
               <a:rPr lang="en-IN" dirty="0"/>
               <a:t>Hager, G. (2017). Introduction To high performance computing for scientists and engineers: CRC press.</a:t>
             </a:r>
+            <a:endParaRPr lang="en-IN" dirty="0"/>
           </a:p>
           <a:p>
             <a:r>
@@ -25666,6 +25765,7 @@
               <a:rPr lang="en-IN" dirty="0"/>
               <a:t>. Computer architecture: a quantitative approach, 5th edition</a:t>
             </a:r>
+            <a:endParaRPr lang="en-IN" dirty="0"/>
           </a:p>
           <a:p>
             <a:endParaRPr lang="en-US" dirty="0"/>
@@ -25696,11 +25796,6 @@
         </p:txBody>
       </p:sp>
     </p:spTree>
-    <p:extLst>
-      <p:ext uri="{BB962C8B-B14F-4D97-AF65-F5344CB8AC3E}">
-        <p14:creationId xmlns:p14="http://schemas.microsoft.com/office/powerpoint/2010/main" val="1423911772"/>
-      </p:ext>
-    </p:extLst>
   </p:cSld>
   <p:clrMapOvr>
     <a:masterClrMapping/>
@@ -25767,24 +25862,28 @@
               <a:rPr lang="en-IN" dirty="0"/>
               <a:t>Pipelined  functional units: instruction level parallelism</a:t>
             </a:r>
+            <a:endParaRPr lang="en-IN" dirty="0"/>
           </a:p>
           <a:p>
             <a:r>
               <a:rPr lang="en-IN" dirty="0"/>
               <a:t>Superscalar architecture</a:t>
             </a:r>
+            <a:endParaRPr lang="en-IN" dirty="0"/>
           </a:p>
           <a:p>
             <a:r>
               <a:rPr lang="en-IN" dirty="0"/>
               <a:t>Out-of-order execution</a:t>
             </a:r>
+            <a:endParaRPr lang="en-IN" dirty="0"/>
           </a:p>
           <a:p>
             <a:r>
               <a:rPr lang="en-IN" dirty="0"/>
               <a:t>Larger Caches</a:t>
             </a:r>
+            <a:endParaRPr lang="en-IN" dirty="0"/>
           </a:p>
           <a:p>
             <a:endParaRPr lang="en-US" dirty="0"/>
@@ -25815,11 +25914,6 @@
         </p:txBody>
       </p:sp>
     </p:spTree>
-    <p:extLst>
-      <p:ext uri="{BB962C8B-B14F-4D97-AF65-F5344CB8AC3E}">
-        <p14:creationId xmlns:p14="http://schemas.microsoft.com/office/powerpoint/2010/main" val="469164847"/>
-      </p:ext>
-    </p:extLst>
   </p:cSld>
   <p:clrMapOvr>
     <a:masterClrMapping/>
@@ -25880,42 +25974,47 @@
         <p:spPr/>
         <p:txBody>
           <a:bodyPr>
-            <a:normAutofit fontScale="85000" lnSpcReduction="10000"/>
+            <a:normAutofit lnSpcReduction="10000"/>
           </a:bodyPr>
           <a:lstStyle/>
           <a:p>
             <a:r>
-              <a:rPr lang="en-IN" dirty="0"/>
+              <a:rPr lang="en-IN" sz="3200" dirty="0"/>
               <a:t>More complexity will not lead to more efficiency</a:t>
             </a:r>
-          </a:p>
-          <a:p>
-            <a:r>
-              <a:rPr lang="en-IN" dirty="0"/>
+            <a:endParaRPr lang="en-IN" sz="3200" dirty="0"/>
+          </a:p>
+          <a:p>
+            <a:r>
+              <a:rPr lang="en-IN" sz="3200" dirty="0"/>
               <a:t>More functional units are packed into CPU</a:t>
             </a:r>
-          </a:p>
-          <a:p>
-            <a:r>
-              <a:rPr lang="en-IN" dirty="0"/>
+            <a:endParaRPr lang="en-IN" sz="3200" dirty="0"/>
+          </a:p>
+          <a:p>
+            <a:r>
+              <a:rPr lang="en-IN" sz="3200" dirty="0"/>
               <a:t>The higher probability that the “average” code will not be able to use them</a:t>
             </a:r>
+            <a:endParaRPr lang="en-IN" sz="3200" dirty="0"/>
           </a:p>
           <a:p>
             <a:pPr lvl="1"/>
             <a:r>
-              <a:rPr lang="en-IN" dirty="0"/>
+              <a:rPr lang="en-IN" sz="2400" dirty="0"/>
               <a:t>As the number of independent instructions in a sequential instruction stream is limited.</a:t>
             </a:r>
-          </a:p>
-          <a:p>
-            <a:r>
-              <a:rPr lang="en-IN" dirty="0"/>
+            <a:endParaRPr lang="en-IN" sz="2400" dirty="0"/>
+          </a:p>
+          <a:p>
+            <a:r>
+              <a:rPr lang="en-IN" sz="3200" dirty="0"/>
               <a:t>Faster clock boosts power dissipation making idling transistors useless</a:t>
             </a:r>
-          </a:p>
-          <a:p>
-            <a:endParaRPr lang="en-US" dirty="0"/>
+            <a:endParaRPr lang="en-IN" sz="3200" dirty="0"/>
+          </a:p>
+          <a:p>
+            <a:endParaRPr lang="en-IN" sz="3200" dirty="0"/>
           </a:p>
         </p:txBody>
       </p:sp>
@@ -25943,11 +26042,6 @@
         </p:txBody>
       </p:sp>
     </p:spTree>
-    <p:extLst>
-      <p:ext uri="{BB962C8B-B14F-4D97-AF65-F5344CB8AC3E}">
-        <p14:creationId xmlns:p14="http://schemas.microsoft.com/office/powerpoint/2010/main" val="1996884030"/>
-      </p:ext>
-    </p:extLst>
   </p:cSld>
   <p:clrMapOvr>
     <a:masterClrMapping/>
@@ -26014,18 +26108,21 @@
               <a:rPr lang="en-IN" dirty="0"/>
               <a:t>Simplify processor design</a:t>
             </a:r>
+            <a:endParaRPr lang="en-IN" dirty="0"/>
           </a:p>
           <a:p>
             <a:r>
               <a:rPr lang="en-IN" dirty="0"/>
               <a:t>Additional transistors for larger cache</a:t>
             </a:r>
+            <a:endParaRPr lang="en-IN" dirty="0"/>
           </a:p>
           <a:p>
             <a:r>
               <a:rPr lang="en-IN" dirty="0"/>
               <a:t>So, multi-core processors came into existence</a:t>
             </a:r>
+            <a:endParaRPr lang="en-IN" dirty="0"/>
           </a:p>
           <a:p>
             <a:endParaRPr lang="en-US" dirty="0"/>
@@ -26056,11 +26153,6 @@
         </p:txBody>
       </p:sp>
     </p:spTree>
-    <p:extLst>
-      <p:ext uri="{BB962C8B-B14F-4D97-AF65-F5344CB8AC3E}">
-        <p14:creationId xmlns:p14="http://schemas.microsoft.com/office/powerpoint/2010/main" val="4235191786"/>
-      </p:ext>
-    </p:extLst>
   </p:cSld>
   <p:clrMapOvr>
     <a:masterClrMapping/>
@@ -26129,7 +26221,7 @@
             </a:r>
             <a:r>
               <a:rPr lang="en-IN" dirty="0">
-                <a:sym typeface="Wingdings" pitchFamily="2" charset="2"/>
+                <a:sym typeface="Wingdings" panose="05000000000000000000" pitchFamily="2" charset="2"/>
               </a:rPr>
               <a:t></a:t>
             </a:r>
@@ -26137,18 +26229,21 @@
               <a:rPr lang="en-IN" dirty="0"/>
               <a:t>Faster Response Time</a:t>
             </a:r>
+            <a:endParaRPr lang="en-IN" dirty="0"/>
           </a:p>
           <a:p>
             <a:r>
               <a:rPr lang="en-IN" dirty="0"/>
               <a:t>Billions of CPU hours wasted </a:t>
             </a:r>
+            <a:endParaRPr lang="en-IN" dirty="0"/>
           </a:p>
           <a:p>
             <a:r>
               <a:rPr lang="en-IN" dirty="0"/>
               <a:t>Supercomputer users have no idea about limitations of parallel execution</a:t>
             </a:r>
+            <a:endParaRPr lang="en-IN" dirty="0"/>
           </a:p>
           <a:p>
             <a:endParaRPr lang="en-US" dirty="0"/>
@@ -26179,11 +26274,6 @@
         </p:txBody>
       </p:sp>
     </p:spTree>
-    <p:extLst>
-      <p:ext uri="{BB962C8B-B14F-4D97-AF65-F5344CB8AC3E}">
-        <p14:creationId xmlns:p14="http://schemas.microsoft.com/office/powerpoint/2010/main" val="2236118324"/>
-      </p:ext>
-    </p:extLst>
   </p:cSld>
   <p:clrMapOvr>
     <a:masterClrMapping/>
@@ -26254,6 +26344,7 @@
               <a:rPr lang="en-IN" dirty="0"/>
               <a:t>: Huge data can be operated in parallel</a:t>
             </a:r>
+            <a:endParaRPr lang="en-IN" dirty="0"/>
           </a:p>
           <a:p>
             <a:r>
@@ -26264,6 +26355,7 @@
               <a:rPr lang="en-IN" dirty="0"/>
               <a:t>: independent and large tasks in parallel on at the same time.</a:t>
             </a:r>
+            <a:endParaRPr lang="en-IN" dirty="0"/>
           </a:p>
           <a:p>
             <a:endParaRPr lang="en-US" dirty="0"/>
@@ -26294,11 +26386,6 @@
         </p:txBody>
       </p:sp>
     </p:spTree>
-    <p:extLst>
-      <p:ext uri="{BB962C8B-B14F-4D97-AF65-F5344CB8AC3E}">
-        <p14:creationId xmlns:p14="http://schemas.microsoft.com/office/powerpoint/2010/main" val="3628505643"/>
-      </p:ext>
-    </p:extLst>
   </p:cSld>
   <p:clrMapOvr>
     <a:masterClrMapping/>
@@ -26586,8 +26673,11 @@
       </a:bgFillStyleLst>
     </a:fmtScheme>
   </a:themeElements>
-  <a:objectDefaults/>
-  <a:extraClrSchemeLst/>
+  <a:extLst>
+    <a:ext uri="{05A4C25C-085E-4340-85A3-A5531E510DB2}">
+      <thm15:themeFamily xmlns:thm15="http://schemas.microsoft.com/office/thememl/2012/main" name="Office Theme" id="{62F939B6-93AF-4DB8-9C6B-D6C7DFDC589F}" vid="{4A3C46E8-61CC-4603-A589-7422A47A8E4A}"/>
+    </a:ext>
+  </a:extLst>
 </a:theme>
 </file>
 
@@ -26871,187 +26961,10 @@
       </a:bgFillStyleLst>
     </a:fmtScheme>
   </a:themeElements>
-  <a:objectDefaults/>
-  <a:extraClrSchemeLst/>
+  <a:extLst>
+    <a:ext uri="{05A4C25C-085E-4340-85A3-A5531E510DB2}">
+      <thm15:themeFamily xmlns:thm15="http://schemas.microsoft.com/office/thememl/2012/main" name="Office Theme" id="{62F939B6-93AF-4DB8-9C6B-D6C7DFDC589F}" vid="{4A3C46E8-61CC-4603-A589-7422A47A8E4A}"/>
+    </a:ext>
+  </a:extLst>
 </a:theme>
-</file>
-
-<file path=customXml/item1.xml><?xml version="1.0" encoding="utf-8"?>
-<?mso-contentType ?>
-<FormTemplates xmlns="http://schemas.microsoft.com/sharepoint/v3/contenttype/forms">
-  <Display>DocumentLibraryForm</Display>
-  <Edit>DocumentLibraryForm</Edit>
-  <New>DocumentLibraryForm</New>
-</FormTemplates>
-</file>
-
-<file path=customXml/item2.xml><?xml version="1.0" encoding="utf-8"?>
-<ct:contentTypeSchema xmlns:ct="http://schemas.microsoft.com/office/2006/metadata/contentType" xmlns:ma="http://schemas.microsoft.com/office/2006/metadata/properties/metaAttributes" ct:_="" ma:_="" ma:contentTypeName="Document" ma:contentTypeID="0x0101008D6C2FF4A65BCA4C98CA0E5FCE415DB2" ma:contentTypeVersion="4" ma:contentTypeDescription="Create a new document." ma:contentTypeScope="" ma:versionID="ea602aa29029d417b8d18c21af9ecdb0">
-  <xsd:schema xmlns:xsd="http://www.w3.org/2001/XMLSchema" xmlns:xs="http://www.w3.org/2001/XMLSchema" xmlns:p="http://schemas.microsoft.com/office/2006/metadata/properties" xmlns:ns2="58fe58fc-72d2-4402-86d5-224c40a3db1c" targetNamespace="http://schemas.microsoft.com/office/2006/metadata/properties" ma:root="true" ma:fieldsID="808c8ca2c768d626c28528b9d4e0bf56" ns2:_="">
-    <xsd:import namespace="58fe58fc-72d2-4402-86d5-224c40a3db1c"/>
-    <xsd:element name="properties">
-      <xsd:complexType>
-        <xsd:sequence>
-          <xsd:element name="documentManagement">
-            <xsd:complexType>
-              <xsd:all>
-                <xsd:element ref="ns2:MediaServiceMetadata" minOccurs="0"/>
-                <xsd:element ref="ns2:MediaServiceFastMetadata" minOccurs="0"/>
-                <xsd:element ref="ns2:MediaServiceDateTaken" minOccurs="0"/>
-                <xsd:element ref="ns2:MediaLengthInSeconds" minOccurs="0"/>
-              </xsd:all>
-            </xsd:complexType>
-          </xsd:element>
-        </xsd:sequence>
-      </xsd:complexType>
-    </xsd:element>
-  </xsd:schema>
-  <xsd:schema xmlns:xsd="http://www.w3.org/2001/XMLSchema" xmlns:xs="http://www.w3.org/2001/XMLSchema" xmlns:dms="http://schemas.microsoft.com/office/2006/documentManagement/types" xmlns:pc="http://schemas.microsoft.com/office/infopath/2007/PartnerControls" targetNamespace="58fe58fc-72d2-4402-86d5-224c40a3db1c" elementFormDefault="qualified">
-    <xsd:import namespace="http://schemas.microsoft.com/office/2006/documentManagement/types"/>
-    <xsd:import namespace="http://schemas.microsoft.com/office/infopath/2007/PartnerControls"/>
-    <xsd:element name="MediaServiceMetadata" ma:index="8" nillable="true" ma:displayName="MediaServiceMetadata" ma:hidden="true" ma:internalName="MediaServiceMetadata" ma:readOnly="true">
-      <xsd:simpleType>
-        <xsd:restriction base="dms:Note"/>
-      </xsd:simpleType>
-    </xsd:element>
-    <xsd:element name="MediaServiceFastMetadata" ma:index="9" nillable="true" ma:displayName="MediaServiceFastMetadata" ma:hidden="true" ma:internalName="MediaServiceFastMetadata" ma:readOnly="true">
-      <xsd:simpleType>
-        <xsd:restriction base="dms:Note"/>
-      </xsd:simpleType>
-    </xsd:element>
-    <xsd:element name="MediaServiceDateTaken" ma:index="10" nillable="true" ma:displayName="MediaServiceDateTaken" ma:hidden="true" ma:internalName="MediaServiceDateTaken" ma:readOnly="true">
-      <xsd:simpleType>
-        <xsd:restriction base="dms:Text"/>
-      </xsd:simpleType>
-    </xsd:element>
-    <xsd:element name="MediaLengthInSeconds" ma:index="11" nillable="true" ma:displayName="MediaLengthInSeconds" ma:hidden="true" ma:internalName="MediaLengthInSeconds" ma:readOnly="true">
-      <xsd:simpleType>
-        <xsd:restriction base="dms:Unknown"/>
-      </xsd:simpleType>
-    </xsd:element>
-  </xsd:schema>
-  <xsd:schema xmlns="http://schemas.openxmlformats.org/package/2006/metadata/core-properties" xmlns:xsd="http://www.w3.org/2001/XMLSchema" xmlns:xsi="http://www.w3.org/2001/XMLSchema-instance" xmlns:dc="http://purl.org/dc/elements/1.1/" xmlns:dcterms="http://purl.org/dc/terms/" xmlns:odoc="http://schemas.microsoft.com/internal/obd" targetNamespace="http://schemas.openxmlformats.org/package/2006/metadata/core-properties" elementFormDefault="qualified" attributeFormDefault="unqualified" blockDefault="#all">
-    <xsd:import namespace="http://purl.org/dc/elements/1.1/" schemaLocation="http://dublincore.org/schemas/xmls/qdc/2003/04/02/dc.xsd"/>
-    <xsd:import namespace="http://purl.org/dc/terms/" schemaLocation="http://dublincore.org/schemas/xmls/qdc/2003/04/02/dcterms.xsd"/>
-    <xsd:element name="coreProperties" type="CT_coreProperties"/>
-    <xsd:complexType name="CT_coreProperties">
-      <xsd:all>
-        <xsd:element ref="dc:creator" minOccurs="0" maxOccurs="1"/>
-        <xsd:element ref="dcterms:created" minOccurs="0" maxOccurs="1"/>
-        <xsd:element ref="dc:identifier" minOccurs="0" maxOccurs="1"/>
-        <xsd:element name="contentType" minOccurs="0" maxOccurs="1" type="xsd:string" ma:index="0" ma:displayName="Content Type"/>
-        <xsd:element ref="dc:title" minOccurs="0" maxOccurs="1" ma:index="4" ma:displayName="Title"/>
-        <xsd:element ref="dc:subject" minOccurs="0" maxOccurs="1"/>
-        <xsd:element ref="dc:description" minOccurs="0" maxOccurs="1"/>
-        <xsd:element name="keywords" minOccurs="0" maxOccurs="1" type="xsd:string"/>
-        <xsd:element ref="dc:language" minOccurs="0" maxOccurs="1"/>
-        <xsd:element name="category" minOccurs="0" maxOccurs="1" type="xsd:string"/>
-        <xsd:element name="version" minOccurs="0" maxOccurs="1" type="xsd:string"/>
-        <xsd:element name="revision" minOccurs="0" maxOccurs="1" type="xsd:string">
-          <xsd:annotation>
-            <xsd:documentation>
-                        This value indicates the number of saves or revisions. The application is responsible for updating this value after each revision.
-                    </xsd:documentation>
-          </xsd:annotation>
-        </xsd:element>
-        <xsd:element name="lastModifiedBy" minOccurs="0" maxOccurs="1" type="xsd:string"/>
-        <xsd:element ref="dcterms:modified" minOccurs="0" maxOccurs="1"/>
-        <xsd:element name="contentStatus" minOccurs="0" maxOccurs="1" type="xsd:string"/>
-      </xsd:all>
-    </xsd:complexType>
-  </xsd:schema>
-  <xs:schema xmlns:pc="http://schemas.microsoft.com/office/infopath/2007/PartnerControls" xmlns:xs="http://www.w3.org/2001/XMLSchema" targetNamespace="http://schemas.microsoft.com/office/infopath/2007/PartnerControls" elementFormDefault="qualified" attributeFormDefault="unqualified">
-    <xs:element name="Person">
-      <xs:complexType>
-        <xs:sequence>
-          <xs:element ref="pc:DisplayName" minOccurs="0"/>
-          <xs:element ref="pc:AccountId" minOccurs="0"/>
-          <xs:element ref="pc:AccountType" minOccurs="0"/>
-        </xs:sequence>
-      </xs:complexType>
-    </xs:element>
-    <xs:element name="DisplayName" type="xs:string"/>
-    <xs:element name="AccountId" type="xs:string"/>
-    <xs:element name="AccountType" type="xs:string"/>
-    <xs:element name="BDCAssociatedEntity">
-      <xs:complexType>
-        <xs:sequence>
-          <xs:element ref="pc:BDCEntity" minOccurs="0" maxOccurs="unbounded"/>
-        </xs:sequence>
-        <xs:attribute ref="pc:EntityNamespace"/>
-        <xs:attribute ref="pc:EntityName"/>
-        <xs:attribute ref="pc:SystemInstanceName"/>
-        <xs:attribute ref="pc:AssociationName"/>
-      </xs:complexType>
-    </xs:element>
-    <xs:attribute name="EntityNamespace" type="xs:string"/>
-    <xs:attribute name="EntityName" type="xs:string"/>
-    <xs:attribute name="SystemInstanceName" type="xs:string"/>
-    <xs:attribute name="AssociationName" type="xs:string"/>
-    <xs:element name="BDCEntity">
-      <xs:complexType>
-        <xs:sequence>
-          <xs:element ref="pc:EntityDisplayName" minOccurs="0"/>
-          <xs:element ref="pc:EntityInstanceReference" minOccurs="0"/>
-          <xs:element ref="pc:EntityId1" minOccurs="0"/>
-          <xs:element ref="pc:EntityId2" minOccurs="0"/>
-          <xs:element ref="pc:EntityId3" minOccurs="0"/>
-          <xs:element ref="pc:EntityId4" minOccurs="0"/>
-          <xs:element ref="pc:EntityId5" minOccurs="0"/>
-        </xs:sequence>
-      </xs:complexType>
-    </xs:element>
-    <xs:element name="EntityDisplayName" type="xs:string"/>
-    <xs:element name="EntityInstanceReference" type="xs:string"/>
-    <xs:element name="EntityId1" type="xs:string"/>
-    <xs:element name="EntityId2" type="xs:string"/>
-    <xs:element name="EntityId3" type="xs:string"/>
-    <xs:element name="EntityId4" type="xs:string"/>
-    <xs:element name="EntityId5" type="xs:string"/>
-    <xs:element name="Terms">
-      <xs:complexType>
-        <xs:sequence>
-          <xs:element ref="pc:TermInfo" minOccurs="0" maxOccurs="unbounded"/>
-        </xs:sequence>
-      </xs:complexType>
-    </xs:element>
-    <xs:element name="TermInfo">
-      <xs:complexType>
-        <xs:sequence>
-          <xs:element ref="pc:TermName" minOccurs="0"/>
-          <xs:element ref="pc:TermId" minOccurs="0"/>
-        </xs:sequence>
-      </xs:complexType>
-    </xs:element>
-    <xs:element name="TermName" type="xs:string"/>
-    <xs:element name="TermId" type="xs:string"/>
-  </xs:schema>
-</ct:contentTypeSchema>
-</file>
-
-<file path=customXml/item3.xml><?xml version="1.0" encoding="utf-8"?>
-<p:properties xmlns:p="http://schemas.microsoft.com/office/2006/metadata/properties" xmlns:xsi="http://www.w3.org/2001/XMLSchema-instance" xmlns:pc="http://schemas.microsoft.com/office/infopath/2007/PartnerControls">
-  <documentManagement/>
-</p:properties>
-</file>
-
-<file path=customXml/itemProps1.xml><?xml version="1.0" encoding="utf-8"?>
-<ds:datastoreItem xmlns:ds="http://schemas.openxmlformats.org/officeDocument/2006/customXml" ds:itemID="{AC7519F2-64DB-4215-BE47-F764050F519D}">
-  <ds:schemaRefs>
-    <ds:schemaRef ds:uri="http://schemas.microsoft.com/sharepoint/v3/contenttype/forms"/>
-  </ds:schemaRefs>
-</ds:datastoreItem>
-</file>
-
-<file path=customXml/itemProps2.xml><?xml version="1.0" encoding="utf-8"?>
-<ds:datastoreItem xmlns:ds="http://schemas.openxmlformats.org/officeDocument/2006/customXml" ds:itemID="{D01362D2-FA16-45F9-926E-D29FA232C1B0}"/>
-</file>
-
-<file path=customXml/itemProps3.xml><?xml version="1.0" encoding="utf-8"?>
-<ds:datastoreItem xmlns:ds="http://schemas.openxmlformats.org/officeDocument/2006/customXml" ds:itemID="{573AA5E9-D4CD-4866-A819-D25D6EE6A82A}">
-  <ds:schemaRefs>
-    <ds:schemaRef ds:uri="http://schemas.microsoft.com/office/2006/metadata/properties"/>
-    <ds:schemaRef ds:uri="http://schemas.microsoft.com/office/infopath/2007/PartnerControls"/>
-  </ds:schemaRefs>
-</ds:datastoreItem>
 </file>